--- a/decks/04-skill-advanced-mcp/4회차-Skill심화-웹MCP-MCP개발.pptx
+++ b/decks/04-skill-advanced-mcp/4회차-Skill심화-웹MCP-MCP개발.pptx
@@ -5,7 +5,7 @@
     <p:sldMasterId id="2147483648" r:id="rId1"/>
   </p:sldMasterIdLst>
   <p:notesMasterIdLst>
-    <p:notesMasterId r:id="rId18"/>
+    <p:notesMasterId r:id="rId17"/>
   </p:notesMasterIdLst>
   <p:sldIdLst>
     <p:sldId id="256" r:id="rId2"/>
@@ -21,9 +21,8 @@
     <p:sldId id="454" r:id="rId12"/>
     <p:sldId id="455" r:id="rId13"/>
     <p:sldId id="262" r:id="rId14"/>
-    <p:sldId id="263" r:id="rId15"/>
-    <p:sldId id="264" r:id="rId16"/>
-    <p:sldId id="266" r:id="rId17"/>
+    <p:sldId id="264" r:id="rId15"/>
+    <p:sldId id="266" r:id="rId16"/>
   </p:sldIdLst>
   <p:sldSz cx="14630400" cy="8229600"/>
   <p:notesSz cx="8229600" cy="14630400"/>
@@ -850,7 +849,7 @@
           <a:p>
             <a:r>
               <a:rPr lang="en-US" dirty="0"/>
-              <a:t>Skill+MCP 결합. Skill='절차', MCP='도구'. SKILL.md 본문에 도구 사용 단계를 한 줄 추가하는 것으로 결합(공식 Skill 'Compose'). 출처: https://code.claude.com/docs/en/skills , https://code.claude.com/docs/en/mcp</a:t>
+              <a:t>실습 3종(커리큘럼 그대로). ①③ 직접 실습(산출물), ② beta·로그인 필요라 데모. 출처: https://github.com/microsoft/playwright-mcp , https://code.claude.com/docs/en/chrome , https://code.claude.com/docs/en/mcp</a:t>
             </a:r>
           </a:p>
         </p:txBody>
@@ -937,7 +936,7 @@
           <a:p>
             <a:r>
               <a:rPr lang="en-US" dirty="0"/>
-              <a:t>실습 3종(커리큘럼 그대로). ①③ 직접 실습(산출물), ② beta·로그인 필요라 데모. 출처: https://github.com/microsoft/playwright-mcp , https://code.claude.com/docs/en/chrome , https://code.claude.com/docs/en/mcp</a:t>
+              <a:t>종합 정리. 회차 흐름 3→4→5. 2주 과제(웹 주기 정보를 Playwright MCP 조회 Skill로, 5회차 재료). 출처: https://code.claude.com/docs/en/mcp , https://code.claude.com/docs/en/skills</a:t>
             </a:r>
           </a:p>
         </p:txBody>
@@ -960,93 +959,6 @@
             <a:fld id="{F7021451-1387-4CA6-816F-3879F97B5CBC}" type="slidenum">
               <a:rPr lang="en-US"/>
               <a:t>15</a:t>
-            </a:fld>
-            <a:endParaRPr lang="en-US"/>
-          </a:p>
-        </p:txBody>
-      </p:sp>
-    </p:spTree>
-    <p:extLst>
-      <p:ext uri="{BB962C8B-B14F-4D97-AF65-F5344CB8AC3E}">
-        <p14:creationId xmlns:p14="http://schemas.microsoft.com/office/powerpoint/2010/main" val="1024086991"/>
-      </p:ext>
-    </p:extLst>
-  </p:cSld>
-  <p:clrMapOvr>
-    <a:masterClrMapping/>
-  </p:clrMapOvr>
-</p:notes>
-</file>
-
-<file path=ppt/notesSlides/notesSlide16.xml><?xml version="1.0" encoding="utf-8"?>
-<p:notes xmlns:a="http://schemas.openxmlformats.org/drawingml/2006/main" xmlns:r="http://schemas.openxmlformats.org/officeDocument/2006/relationships" xmlns:p="http://schemas.openxmlformats.org/presentationml/2006/main">
-  <p:cSld>
-    <p:spTree>
-      <p:nvGrpSpPr>
-        <p:cNvPr id="1" name=""/>
-        <p:cNvGrpSpPr/>
-        <p:nvPr/>
-      </p:nvGrpSpPr>
-      <p:grpSpPr>
-        <a:xfrm>
-          <a:off x="0" y="0"/>
-          <a:ext cx="0" cy="0"/>
-          <a:chOff x="0" y="0"/>
-          <a:chExt cx="0" cy="0"/>
-        </a:xfrm>
-      </p:grpSpPr>
-      <p:sp>
-        <p:nvSpPr>
-          <p:cNvPr id="2" name="Slide Image Placeholder 1"/>
-          <p:cNvSpPr>
-            <a:spLocks noGrp="1" noRot="1" noChangeAspect="1"/>
-          </p:cNvSpPr>
-          <p:nvPr>
-            <p:ph type="sldImg"/>
-          </p:nvPr>
-        </p:nvSpPr>
-        <p:spPr/>
-      </p:sp>
-      <p:sp>
-        <p:nvSpPr>
-          <p:cNvPr id="3" name="Notes Placeholder 2"/>
-          <p:cNvSpPr>
-            <a:spLocks noGrp="1"/>
-          </p:cNvSpPr>
-          <p:nvPr>
-            <p:ph type="body" idx="1"/>
-          </p:nvPr>
-        </p:nvSpPr>
-        <p:spPr/>
-        <p:txBody>
-          <a:bodyPr/>
-          <a:lstStyle/>
-          <a:p>
-            <a:r>
-              <a:rPr lang="en-US" dirty="0"/>
-              <a:t>종합 정리. 회차 흐름 3→4→5. 2주 과제(웹 주기 정보를 Playwright MCP 조회 Skill로, 5회차 재료). 출처: https://code.claude.com/docs/en/mcp , https://code.claude.com/docs/en/skills</a:t>
-            </a:r>
-          </a:p>
-        </p:txBody>
-      </p:sp>
-      <p:sp>
-        <p:nvSpPr>
-          <p:cNvPr id="4" name="Slide Number Placeholder 3"/>
-          <p:cNvSpPr>
-            <a:spLocks noGrp="1"/>
-          </p:cNvSpPr>
-          <p:nvPr>
-            <p:ph type="sldNum" sz="quarter" idx="10"/>
-          </p:nvPr>
-        </p:nvSpPr>
-        <p:spPr/>
-        <p:txBody>
-          <a:bodyPr/>
-          <a:lstStyle/>
-          <a:p>
-            <a:fld id="{F7021451-1387-4CA6-816F-3879F97B5CBC}" type="slidenum">
-              <a:rPr lang="en-US"/>
-              <a:t>16</a:t>
             </a:fld>
             <a:endParaRPr lang="en-US"/>
           </a:p>
@@ -10125,8 +10037,8 @@
         </p:nvSpPr>
         <p:spPr>
           <a:xfrm>
-            <a:off x="457200" y="2583183"/>
-            <a:ext cx="6583680" cy="1338739"/>
+            <a:off x="457200" y="2583184"/>
+            <a:ext cx="6583680" cy="1060130"/>
           </a:xfrm>
           <a:prstGeom prst="roundRect">
             <a:avLst>
@@ -10154,7 +10066,7 @@
         </p:nvSpPr>
         <p:spPr>
           <a:xfrm>
-            <a:off x="457200" y="2583183"/>
+            <a:off x="457200" y="2433164"/>
             <a:ext cx="6583680" cy="1288733"/>
           </a:xfrm>
           <a:prstGeom prst="rect">
@@ -10376,7 +10288,7 @@
         </p:nvGrpSpPr>
         <p:grpSpPr>
           <a:xfrm>
-            <a:off x="457200" y="4219106"/>
+            <a:off x="457200" y="3847627"/>
             <a:ext cx="6583680" cy="804672"/>
             <a:chOff x="457200" y="3383280"/>
             <a:chExt cx="6583680" cy="804672"/>
@@ -10476,7 +10388,7 @@
         </p:nvGrpSpPr>
         <p:grpSpPr>
           <a:xfrm>
-            <a:off x="457200" y="5390682"/>
+            <a:off x="457200" y="4854893"/>
             <a:ext cx="6583680" cy="804672"/>
             <a:chOff x="457200" y="4297680"/>
             <a:chExt cx="6583680" cy="804672"/>
@@ -10544,7 +10456,139 @@
                   <a:ea typeface="Pretendard" pitchFamily="34" charset="-122"/>
                   <a:cs typeface="Pretendard" pitchFamily="34" charset="-120"/>
                 </a:rPr>
-                <a:t>③ 연결·확인: MCP로 등록 → 도구가 잘 보이는지 확인 후 사용</a:t>
+                <a:t>③ </a:t>
+              </a:r>
+              <a:r>
+                <a:rPr lang="en-US" sz="1600" b="1" dirty="0" err="1">
+                  <a:solidFill>
+                    <a:srgbClr val="FFFFFF"/>
+                  </a:solidFill>
+                  <a:latin typeface="Pretendard" pitchFamily="34" charset="0"/>
+                  <a:ea typeface="Pretendard" pitchFamily="34" charset="-122"/>
+                  <a:cs typeface="Pretendard" pitchFamily="34" charset="-120"/>
+                </a:rPr>
+                <a:t>MCP로</a:t>
+              </a:r>
+              <a:r>
+                <a:rPr lang="en-US" sz="1600" b="1" dirty="0">
+                  <a:solidFill>
+                    <a:srgbClr val="FFFFFF"/>
+                  </a:solidFill>
+                  <a:latin typeface="Pretendard" pitchFamily="34" charset="0"/>
+                  <a:ea typeface="Pretendard" pitchFamily="34" charset="-122"/>
+                  <a:cs typeface="Pretendard" pitchFamily="34" charset="-120"/>
+                </a:rPr>
+                <a:t> </a:t>
+              </a:r>
+              <a:r>
+                <a:rPr lang="en-US" sz="1600" b="1" dirty="0" err="1">
+                  <a:solidFill>
+                    <a:srgbClr val="FFFFFF"/>
+                  </a:solidFill>
+                  <a:latin typeface="Pretendard" pitchFamily="34" charset="0"/>
+                  <a:ea typeface="Pretendard" pitchFamily="34" charset="-122"/>
+                  <a:cs typeface="Pretendard" pitchFamily="34" charset="-120"/>
+                </a:rPr>
+                <a:t>등록</a:t>
+              </a:r>
+              <a:r>
+                <a:rPr lang="en-US" sz="1600" b="1" dirty="0">
+                  <a:solidFill>
+                    <a:srgbClr val="FFFFFF"/>
+                  </a:solidFill>
+                  <a:latin typeface="Pretendard" pitchFamily="34" charset="0"/>
+                  <a:ea typeface="Pretendard" pitchFamily="34" charset="-122"/>
+                  <a:cs typeface="Pretendard" pitchFamily="34" charset="-120"/>
+                </a:rPr>
+                <a:t>: “</a:t>
+              </a:r>
+              <a:r>
+                <a:rPr lang="ko-KR" altLang="en-US" sz="1600" b="1" dirty="0" err="1">
+                  <a:solidFill>
+                    <a:srgbClr val="FFFFFF"/>
+                  </a:solidFill>
+                  <a:latin typeface="Pretendard" pitchFamily="34" charset="0"/>
+                  <a:ea typeface="Pretendard" pitchFamily="34" charset="-122"/>
+                  <a:cs typeface="Pretendard" pitchFamily="34" charset="-120"/>
+                </a:rPr>
+                <a:t>유저스콥으로</a:t>
+              </a:r>
+              <a:r>
+                <a:rPr lang="ko-KR" altLang="en-US" sz="1600" b="1" dirty="0">
+                  <a:solidFill>
+                    <a:srgbClr val="FFFFFF"/>
+                  </a:solidFill>
+                  <a:latin typeface="Pretendard" pitchFamily="34" charset="0"/>
+                  <a:ea typeface="Pretendard" pitchFamily="34" charset="-122"/>
+                  <a:cs typeface="Pretendard" pitchFamily="34" charset="-120"/>
+                </a:rPr>
+                <a:t> </a:t>
+              </a:r>
+              <a:r>
+                <a:rPr lang="en-US" altLang="ko-KR" sz="1600" b="1" dirty="0">
+                  <a:solidFill>
+                    <a:srgbClr val="FFFFFF"/>
+                  </a:solidFill>
+                  <a:latin typeface="Pretendard" pitchFamily="34" charset="0"/>
+                  <a:ea typeface="Pretendard" pitchFamily="34" charset="-122"/>
+                  <a:cs typeface="Pretendard" pitchFamily="34" charset="-120"/>
+                </a:rPr>
+                <a:t>‘xxx’</a:t>
+              </a:r>
+              <a:r>
+                <a:rPr lang="ko-KR" altLang="en-US" sz="1600" b="1" dirty="0">
+                  <a:solidFill>
+                    <a:srgbClr val="FFFFFF"/>
+                  </a:solidFill>
+                  <a:latin typeface="Pretendard" pitchFamily="34" charset="0"/>
+                  <a:ea typeface="Pretendard" pitchFamily="34" charset="-122"/>
+                  <a:cs typeface="Pretendard" pitchFamily="34" charset="-120"/>
+                </a:rPr>
+                <a:t>라는 이름으로 </a:t>
+              </a:r>
+              <a:r>
+                <a:rPr lang="en-US" altLang="ko-KR" sz="1600" b="1" dirty="0">
+                  <a:solidFill>
+                    <a:srgbClr val="FFFFFF"/>
+                  </a:solidFill>
+                  <a:latin typeface="Pretendard" pitchFamily="34" charset="0"/>
+                  <a:ea typeface="Pretendard" pitchFamily="34" charset="-122"/>
+                  <a:cs typeface="Pretendard" pitchFamily="34" charset="-120"/>
+                </a:rPr>
+                <a:t>MCP </a:t>
+              </a:r>
+              <a:r>
+                <a:rPr lang="ko-KR" altLang="en-US" sz="1600" b="1" dirty="0">
+                  <a:solidFill>
+                    <a:srgbClr val="FFFFFF"/>
+                  </a:solidFill>
+                  <a:latin typeface="Pretendard" pitchFamily="34" charset="0"/>
+                  <a:ea typeface="Pretendard" pitchFamily="34" charset="-122"/>
+                  <a:cs typeface="Pretendard" pitchFamily="34" charset="-120"/>
+                </a:rPr>
+                <a:t>등록해요</a:t>
+              </a:r>
+              <a:r>
+                <a:rPr lang="en-US" altLang="ko-KR" sz="1600" b="1" dirty="0">
+                  <a:solidFill>
+                    <a:srgbClr val="FFFFFF"/>
+                  </a:solidFill>
+                  <a:latin typeface="Pretendard" pitchFamily="34" charset="0"/>
+                  <a:ea typeface="Pretendard" pitchFamily="34" charset="-122"/>
+                  <a:cs typeface="Pretendard" pitchFamily="34" charset="-120"/>
+                </a:rPr>
+                <a:t>”</a:t>
+              </a:r>
+              <a:r>
+                <a:rPr lang="ko-KR" altLang="en-US" sz="1600" b="1" dirty="0">
+                  <a:solidFill>
+                    <a:srgbClr val="FFFFFF"/>
+                  </a:solidFill>
+                  <a:latin typeface="Pretendard" pitchFamily="34" charset="0"/>
+                  <a:ea typeface="Pretendard" pitchFamily="34" charset="-122"/>
+                  <a:cs typeface="Pretendard" pitchFamily="34" charset="-120"/>
+                </a:rPr>
+                <a:t> </a:t>
               </a:r>
               <a:endParaRPr lang="en-US" sz="1600" dirty="0"/>
             </a:p>
@@ -10560,7 +10604,7 @@
         <p:spPr>
           <a:xfrm>
             <a:off x="7315200" y="2583184"/>
-            <a:ext cx="6858000" cy="3612170"/>
+            <a:ext cx="6858000" cy="3403279"/>
           </a:xfrm>
           <a:prstGeom prst="roundRect">
             <a:avLst>
@@ -10593,7 +10637,7 @@
         </p:nvSpPr>
         <p:spPr>
           <a:xfrm>
-            <a:off x="7479792" y="2692912"/>
+            <a:off x="7479792" y="2614328"/>
             <a:ext cx="6528816" cy="3364988"/>
           </a:xfrm>
           <a:prstGeom prst="rect">
@@ -11408,6 +11452,439 @@
           </a:p>
         </p:txBody>
       </p:sp>
+      <p:grpSp>
+        <p:nvGrpSpPr>
+          <p:cNvPr id="21" name="그룹 20">
+            <a:extLst>
+              <a:ext uri="{FF2B5EF4-FFF2-40B4-BE49-F238E27FC236}">
+                <a16:creationId xmlns:a16="http://schemas.microsoft.com/office/drawing/2014/main" id="{11723260-CCAA-A72D-BD25-DD7CAD7902FA}"/>
+              </a:ext>
+            </a:extLst>
+          </p:cNvPr>
+          <p:cNvGrpSpPr/>
+          <p:nvPr/>
+        </p:nvGrpSpPr>
+        <p:grpSpPr>
+          <a:xfrm>
+            <a:off x="457200" y="5831019"/>
+            <a:ext cx="6583680" cy="804672"/>
+            <a:chOff x="457200" y="4297680"/>
+            <a:chExt cx="6583680" cy="804672"/>
+          </a:xfrm>
+        </p:grpSpPr>
+        <p:sp>
+          <p:nvSpPr>
+            <p:cNvPr id="22" name="Shape 9">
+              <a:extLst>
+                <a:ext uri="{FF2B5EF4-FFF2-40B4-BE49-F238E27FC236}">
+                  <a16:creationId xmlns:a16="http://schemas.microsoft.com/office/drawing/2014/main" id="{EA8AD3E9-CA64-5491-F349-7AD622D48271}"/>
+                </a:ext>
+              </a:extLst>
+            </p:cNvPr>
+            <p:cNvSpPr/>
+            <p:nvPr/>
+          </p:nvSpPr>
+          <p:spPr>
+            <a:xfrm>
+              <a:off x="457200" y="4297680"/>
+              <a:ext cx="6583680" cy="804672"/>
+            </a:xfrm>
+            <a:prstGeom prst="roundRect">
+              <a:avLst>
+                <a:gd name="adj" fmla="val 6818"/>
+              </a:avLst>
+            </a:prstGeom>
+            <a:solidFill>
+              <a:srgbClr val="059669"/>
+            </a:solidFill>
+            <a:ln/>
+          </p:spPr>
+          <p:txBody>
+            <a:bodyPr/>
+            <a:lstStyle/>
+            <a:p>
+              <a:endParaRPr lang="ko-KR" altLang="en-US"/>
+            </a:p>
+          </p:txBody>
+        </p:sp>
+        <p:sp>
+          <p:nvSpPr>
+            <p:cNvPr id="23" name="Text 10">
+              <a:extLst>
+                <a:ext uri="{FF2B5EF4-FFF2-40B4-BE49-F238E27FC236}">
+                  <a16:creationId xmlns:a16="http://schemas.microsoft.com/office/drawing/2014/main" id="{75207916-0FBE-ECF4-2655-D01335CABB33}"/>
+                </a:ext>
+              </a:extLst>
+            </p:cNvPr>
+            <p:cNvSpPr/>
+            <p:nvPr/>
+          </p:nvSpPr>
+          <p:spPr>
+            <a:xfrm>
+              <a:off x="457200" y="4297680"/>
+              <a:ext cx="6583680" cy="804672"/>
+            </a:xfrm>
+            <a:prstGeom prst="rect">
+              <a:avLst/>
+            </a:prstGeom>
+            <a:noFill/>
+            <a:ln/>
+          </p:spPr>
+          <p:txBody>
+            <a:bodyPr wrap="square" rtlCol="0" anchor="ctr"/>
+            <a:lstStyle/>
+            <a:p>
+              <a:pPr marL="0" indent="0" algn="ctr">
+                <a:buNone/>
+              </a:pPr>
+              <a:r>
+                <a:rPr lang="ko-KR" altLang="en-US" sz="1600" b="1" dirty="0">
+                  <a:solidFill>
+                    <a:srgbClr val="FFFFFF"/>
+                  </a:solidFill>
+                  <a:latin typeface="Pretendard" pitchFamily="34" charset="0"/>
+                  <a:ea typeface="Pretendard" pitchFamily="34" charset="-122"/>
+                  <a:cs typeface="Pretendard" pitchFamily="34" charset="-120"/>
+                </a:rPr>
+                <a:t>④</a:t>
+              </a:r>
+              <a:r>
+                <a:rPr lang="en-US" sz="1600" b="1" dirty="0">
+                  <a:solidFill>
+                    <a:srgbClr val="FFFFFF"/>
+                  </a:solidFill>
+                  <a:latin typeface="Pretendard" pitchFamily="34" charset="0"/>
+                  <a:ea typeface="Pretendard" pitchFamily="34" charset="-122"/>
+                  <a:cs typeface="Pretendard" pitchFamily="34" charset="-120"/>
+                </a:rPr>
+                <a:t> </a:t>
+              </a:r>
+              <a:r>
+                <a:rPr lang="en-US" sz="1600" b="1" dirty="0" err="1">
+                  <a:solidFill>
+                    <a:srgbClr val="FFFFFF"/>
+                  </a:solidFill>
+                  <a:latin typeface="Pretendard" pitchFamily="34" charset="0"/>
+                  <a:ea typeface="Pretendard" pitchFamily="34" charset="-122"/>
+                  <a:cs typeface="Pretendard" pitchFamily="34" charset="-120"/>
+                </a:rPr>
+                <a:t>확인</a:t>
+              </a:r>
+              <a:r>
+                <a:rPr lang="en-US" sz="1600" b="1" dirty="0">
+                  <a:solidFill>
+                    <a:srgbClr val="FFFFFF"/>
+                  </a:solidFill>
+                  <a:latin typeface="Pretendard" pitchFamily="34" charset="0"/>
+                  <a:ea typeface="Pretendard" pitchFamily="34" charset="-122"/>
+                  <a:cs typeface="Pretendard" pitchFamily="34" charset="-120"/>
+                </a:rPr>
+                <a:t>: </a:t>
+              </a:r>
+              <a:r>
+                <a:rPr lang="ko-KR" altLang="en-US" sz="1600" b="1" dirty="0">
+                  <a:solidFill>
+                    <a:srgbClr val="FFFFFF"/>
+                  </a:solidFill>
+                  <a:latin typeface="Pretendard" pitchFamily="34" charset="0"/>
+                  <a:ea typeface="Pretendard" pitchFamily="34" charset="-122"/>
+                  <a:cs typeface="Pretendard" pitchFamily="34" charset="-120"/>
+                </a:rPr>
+                <a:t>터미널에서 </a:t>
+              </a:r>
+              <a:r>
+                <a:rPr lang="en-US" altLang="ko-KR" sz="1600" b="1" dirty="0">
+                  <a:solidFill>
+                    <a:srgbClr val="FFFFFF"/>
+                  </a:solidFill>
+                  <a:latin typeface="Pretendard" pitchFamily="34" charset="0"/>
+                  <a:ea typeface="Pretendard" pitchFamily="34" charset="-122"/>
+                  <a:cs typeface="Pretendard" pitchFamily="34" charset="-120"/>
+                </a:rPr>
+                <a:t>“</a:t>
+              </a:r>
+              <a:r>
+                <a:rPr lang="en-US" altLang="ko-KR" sz="1600" b="1" dirty="0" err="1">
+                  <a:solidFill>
+                    <a:srgbClr val="FFFFFF"/>
+                  </a:solidFill>
+                  <a:latin typeface="Pretendard" pitchFamily="34" charset="0"/>
+                  <a:ea typeface="Pretendard" pitchFamily="34" charset="-122"/>
+                  <a:cs typeface="Pretendard" pitchFamily="34" charset="-120"/>
+                </a:rPr>
+                <a:t>claude</a:t>
+              </a:r>
+              <a:r>
+                <a:rPr lang="en-US" altLang="ko-KR" sz="1600" b="1" dirty="0">
+                  <a:solidFill>
+                    <a:srgbClr val="FFFFFF"/>
+                  </a:solidFill>
+                  <a:latin typeface="Pretendard" pitchFamily="34" charset="0"/>
+                  <a:ea typeface="Pretendard" pitchFamily="34" charset="-122"/>
+                  <a:cs typeface="Pretendard" pitchFamily="34" charset="-120"/>
+                </a:rPr>
+                <a:t> </a:t>
+              </a:r>
+              <a:r>
+                <a:rPr lang="en-US" altLang="ko-KR" sz="1600" b="1" dirty="0" err="1">
+                  <a:solidFill>
+                    <a:srgbClr val="FFFFFF"/>
+                  </a:solidFill>
+                  <a:latin typeface="Pretendard" pitchFamily="34" charset="0"/>
+                  <a:ea typeface="Pretendard" pitchFamily="34" charset="-122"/>
+                  <a:cs typeface="Pretendard" pitchFamily="34" charset="-120"/>
+                </a:rPr>
+                <a:t>mcp</a:t>
+              </a:r>
+              <a:r>
+                <a:rPr lang="en-US" altLang="ko-KR" sz="1600" b="1" dirty="0">
+                  <a:solidFill>
+                    <a:srgbClr val="FFFFFF"/>
+                  </a:solidFill>
+                  <a:latin typeface="Pretendard" pitchFamily="34" charset="0"/>
+                  <a:ea typeface="Pretendard" pitchFamily="34" charset="-122"/>
+                  <a:cs typeface="Pretendard" pitchFamily="34" charset="-120"/>
+                </a:rPr>
+                <a:t> list” </a:t>
+              </a:r>
+              <a:r>
+                <a:rPr lang="ko-KR" altLang="en-US" sz="1600" b="1" dirty="0">
+                  <a:solidFill>
+                    <a:srgbClr val="FFFFFF"/>
+                  </a:solidFill>
+                  <a:latin typeface="Pretendard" pitchFamily="34" charset="0"/>
+                  <a:ea typeface="Pretendard" pitchFamily="34" charset="-122"/>
+                  <a:cs typeface="Pretendard" pitchFamily="34" charset="-120"/>
+                </a:rPr>
+                <a:t>명령으로 확인</a:t>
+              </a:r>
+              <a:r>
+                <a:rPr lang="en-US" altLang="ko-KR" sz="1600" b="1" dirty="0">
+                  <a:solidFill>
+                    <a:srgbClr val="FFFFFF"/>
+                  </a:solidFill>
+                  <a:latin typeface="Pretendard" pitchFamily="34" charset="0"/>
+                  <a:ea typeface="Pretendard" pitchFamily="34" charset="-122"/>
+                  <a:cs typeface="Pretendard" pitchFamily="34" charset="-120"/>
+                </a:rPr>
+                <a:t>. </a:t>
+              </a:r>
+            </a:p>
+            <a:p>
+              <a:pPr marL="0" indent="0" algn="ctr">
+                <a:buNone/>
+              </a:pPr>
+              <a:r>
+                <a:rPr lang="en-US" altLang="ko-KR" sz="1600" b="1" dirty="0">
+                  <a:solidFill>
+                    <a:srgbClr val="FFFFFF"/>
+                  </a:solidFill>
+                  <a:latin typeface="Pretendard" pitchFamily="34" charset="0"/>
+                  <a:ea typeface="Pretendard" pitchFamily="34" charset="-122"/>
+                  <a:cs typeface="Pretendard" pitchFamily="34" charset="-120"/>
+                </a:rPr>
+                <a:t>Claude Code </a:t>
+              </a:r>
+              <a:r>
+                <a:rPr lang="ko-KR" altLang="en-US" sz="1600" b="1" dirty="0">
+                  <a:solidFill>
+                    <a:srgbClr val="FFFFFF"/>
+                  </a:solidFill>
+                  <a:latin typeface="Pretendard" pitchFamily="34" charset="0"/>
+                  <a:ea typeface="Pretendard" pitchFamily="34" charset="-122"/>
+                  <a:cs typeface="Pretendard" pitchFamily="34" charset="-120"/>
+                </a:rPr>
+                <a:t>재시작</a:t>
+              </a:r>
+              <a:r>
+                <a:rPr lang="en-US" altLang="ko-KR" sz="1600" b="1" dirty="0">
+                  <a:solidFill>
+                    <a:srgbClr val="FFFFFF"/>
+                  </a:solidFill>
+                  <a:latin typeface="Pretendard" pitchFamily="34" charset="0"/>
+                  <a:ea typeface="Pretendard" pitchFamily="34" charset="-122"/>
+                  <a:cs typeface="Pretendard" pitchFamily="34" charset="-120"/>
+                </a:rPr>
+                <a:t>(X</a:t>
+              </a:r>
+              <a:r>
+                <a:rPr lang="ko-KR" altLang="en-US" sz="1600" b="1" dirty="0">
+                  <a:solidFill>
+                    <a:srgbClr val="FFFFFF"/>
+                  </a:solidFill>
+                  <a:latin typeface="Pretendard" pitchFamily="34" charset="0"/>
+                  <a:ea typeface="Pretendard" pitchFamily="34" charset="-122"/>
+                  <a:cs typeface="Pretendard" pitchFamily="34" charset="-120"/>
+                </a:rPr>
+                <a:t>버튼이 아니라 </a:t>
+              </a:r>
+              <a:r>
+                <a:rPr lang="ko-KR" altLang="en-US" sz="1600" b="1" dirty="0" err="1">
+                  <a:solidFill>
+                    <a:srgbClr val="FFFFFF"/>
+                  </a:solidFill>
+                  <a:latin typeface="Pretendard" pitchFamily="34" charset="0"/>
+                  <a:ea typeface="Pretendard" pitchFamily="34" charset="-122"/>
+                  <a:cs typeface="Pretendard" pitchFamily="34" charset="-120"/>
+                </a:rPr>
+                <a:t>메인메뉴에서</a:t>
+              </a:r>
+              <a:r>
+                <a:rPr lang="ko-KR" altLang="en-US" sz="1600" b="1" dirty="0">
+                  <a:solidFill>
+                    <a:srgbClr val="FFFFFF"/>
+                  </a:solidFill>
+                  <a:latin typeface="Pretendard" pitchFamily="34" charset="0"/>
+                  <a:ea typeface="Pretendard" pitchFamily="34" charset="-122"/>
+                  <a:cs typeface="Pretendard" pitchFamily="34" charset="-120"/>
+                </a:rPr>
+                <a:t> 종료해야 함</a:t>
+              </a:r>
+              <a:r>
+                <a:rPr lang="en-US" altLang="ko-KR" sz="1600" b="1" dirty="0">
+                  <a:solidFill>
+                    <a:srgbClr val="FFFFFF"/>
+                  </a:solidFill>
+                  <a:latin typeface="Pretendard" pitchFamily="34" charset="0"/>
+                  <a:ea typeface="Pretendard" pitchFamily="34" charset="-122"/>
+                  <a:cs typeface="Pretendard" pitchFamily="34" charset="-120"/>
+                </a:rPr>
+                <a:t>)</a:t>
+              </a:r>
+              <a:endParaRPr lang="en-US" sz="1600" dirty="0"/>
+            </a:p>
+          </p:txBody>
+        </p:sp>
+      </p:grpSp>
+      <p:grpSp>
+        <p:nvGrpSpPr>
+          <p:cNvPr id="24" name="그룹 23">
+            <a:extLst>
+              <a:ext uri="{FF2B5EF4-FFF2-40B4-BE49-F238E27FC236}">
+                <a16:creationId xmlns:a16="http://schemas.microsoft.com/office/drawing/2014/main" id="{DE7C1158-52AE-257D-7B74-B3EBD457A662}"/>
+              </a:ext>
+            </a:extLst>
+          </p:cNvPr>
+          <p:cNvGrpSpPr/>
+          <p:nvPr/>
+        </p:nvGrpSpPr>
+        <p:grpSpPr>
+          <a:xfrm>
+            <a:off x="7315200" y="6062190"/>
+            <a:ext cx="6858000" cy="573501"/>
+            <a:chOff x="457200" y="3383280"/>
+            <a:chExt cx="6583680" cy="804672"/>
+          </a:xfrm>
+        </p:grpSpPr>
+        <p:sp>
+          <p:nvSpPr>
+            <p:cNvPr id="26" name="Shape 7">
+              <a:hlinkClick r:id="rId3"/>
+              <a:extLst>
+                <a:ext uri="{FF2B5EF4-FFF2-40B4-BE49-F238E27FC236}">
+                  <a16:creationId xmlns:a16="http://schemas.microsoft.com/office/drawing/2014/main" id="{A10837F7-754E-6C1D-0B9E-F1147ADDEC0B}"/>
+                </a:ext>
+              </a:extLst>
+            </p:cNvPr>
+            <p:cNvSpPr/>
+            <p:nvPr/>
+          </p:nvSpPr>
+          <p:spPr>
+            <a:xfrm>
+              <a:off x="457200" y="3383280"/>
+              <a:ext cx="6583680" cy="804672"/>
+            </a:xfrm>
+            <a:prstGeom prst="roundRect">
+              <a:avLst>
+                <a:gd name="adj" fmla="val 6818"/>
+              </a:avLst>
+            </a:prstGeom>
+            <a:solidFill>
+              <a:srgbClr val="D97706"/>
+            </a:solidFill>
+            <a:ln/>
+          </p:spPr>
+          <p:txBody>
+            <a:bodyPr/>
+            <a:lstStyle/>
+            <a:p>
+              <a:endParaRPr lang="ko-KR" altLang="en-US"/>
+            </a:p>
+          </p:txBody>
+        </p:sp>
+        <p:sp>
+          <p:nvSpPr>
+            <p:cNvPr id="27" name="Text 8">
+              <a:extLst>
+                <a:ext uri="{FF2B5EF4-FFF2-40B4-BE49-F238E27FC236}">
+                  <a16:creationId xmlns:a16="http://schemas.microsoft.com/office/drawing/2014/main" id="{07E9BFF1-AEF9-8B09-0FF3-CB225348F266}"/>
+                </a:ext>
+              </a:extLst>
+            </p:cNvPr>
+            <p:cNvSpPr/>
+            <p:nvPr/>
+          </p:nvSpPr>
+          <p:spPr>
+            <a:xfrm>
+              <a:off x="457200" y="3383280"/>
+              <a:ext cx="6583680" cy="804672"/>
+            </a:xfrm>
+            <a:prstGeom prst="rect">
+              <a:avLst/>
+            </a:prstGeom>
+            <a:noFill/>
+            <a:ln/>
+          </p:spPr>
+          <p:txBody>
+            <a:bodyPr wrap="square" rtlCol="0" anchor="ctr"/>
+            <a:lstStyle/>
+            <a:p>
+              <a:pPr algn="ctr"/>
+              <a:r>
+                <a:rPr lang="ko-KR" altLang="en-US" sz="1600" b="1" dirty="0">
+                  <a:solidFill>
+                    <a:srgbClr val="FFFFFF"/>
+                  </a:solidFill>
+                  <a:latin typeface="Pretendard" pitchFamily="34" charset="0"/>
+                  <a:ea typeface="Pretendard" pitchFamily="34" charset="-122"/>
+                  <a:cs typeface="Pretendard" pitchFamily="34" charset="-120"/>
+                </a:rPr>
+                <a:t>예제 프롬프트</a:t>
+              </a:r>
+              <a:r>
+                <a:rPr lang="en-US" altLang="ko-KR" sz="1600" b="1" dirty="0">
+                  <a:solidFill>
+                    <a:srgbClr val="FFFFFF"/>
+                  </a:solidFill>
+                  <a:latin typeface="Pretendard" pitchFamily="34" charset="0"/>
+                  <a:ea typeface="Pretendard" pitchFamily="34" charset="-122"/>
+                  <a:cs typeface="Pretendard" pitchFamily="34" charset="-120"/>
+                </a:rPr>
+                <a:t> </a:t>
+              </a:r>
+              <a:r>
+                <a:rPr lang="ko-KR" altLang="en-US" sz="1600" b="1" dirty="0">
+                  <a:solidFill>
+                    <a:srgbClr val="FFFFFF"/>
+                  </a:solidFill>
+                  <a:latin typeface="Pretendard" pitchFamily="34" charset="0"/>
+                  <a:ea typeface="Pretendard" pitchFamily="34" charset="-122"/>
+                  <a:cs typeface="Pretendard" pitchFamily="34" charset="-120"/>
+                </a:rPr>
+                <a:t>보기</a:t>
+              </a:r>
+              <a:endParaRPr lang="en-US" altLang="ko-KR" sz="1600" b="1" dirty="0">
+                <a:solidFill>
+                  <a:srgbClr val="FFFFFF"/>
+                </a:solidFill>
+                <a:latin typeface="Pretendard" pitchFamily="34" charset="0"/>
+                <a:ea typeface="Pretendard" pitchFamily="34" charset="-122"/>
+                <a:cs typeface="Pretendard" pitchFamily="34" charset="-120"/>
+              </a:endParaRPr>
+            </a:p>
+          </p:txBody>
+        </p:sp>
+      </p:grpSp>
     </p:spTree>
   </p:cSld>
   <p:clrMapOvr>
@@ -11417,688 +11894,6 @@
 </file>
 
 <file path=ppt/slides/slide14.xml><?xml version="1.0" encoding="utf-8"?>
-<p:sld xmlns:a="http://schemas.openxmlformats.org/drawingml/2006/main" xmlns:r="http://schemas.openxmlformats.org/officeDocument/2006/relationships" xmlns:p="http://schemas.openxmlformats.org/presentationml/2006/main">
-  <p:cSld name="Slide 8">
-    <p:spTree>
-      <p:nvGrpSpPr>
-        <p:cNvPr id="1" name=""/>
-        <p:cNvGrpSpPr/>
-        <p:nvPr/>
-      </p:nvGrpSpPr>
-      <p:grpSpPr>
-        <a:xfrm>
-          <a:off x="0" y="0"/>
-          <a:ext cx="0" cy="0"/>
-          <a:chOff x="0" y="0"/>
-          <a:chExt cx="0" cy="0"/>
-        </a:xfrm>
-      </p:grpSpPr>
-      <p:sp>
-        <p:nvSpPr>
-          <p:cNvPr id="3" name="Text 1"/>
-          <p:cNvSpPr/>
-          <p:nvPr/>
-        </p:nvSpPr>
-        <p:spPr>
-          <a:xfrm>
-            <a:off x="457200" y="411480"/>
-            <a:ext cx="13716000" cy="640080"/>
-          </a:xfrm>
-          <a:prstGeom prst="rect">
-            <a:avLst/>
-          </a:prstGeom>
-          <a:noFill/>
-          <a:ln/>
-        </p:spPr>
-        <p:txBody>
-          <a:bodyPr wrap="square" rtlCol="0" anchor="ctr"/>
-          <a:lstStyle/>
-          <a:p>
-            <a:pPr marL="0" indent="0" algn="l">
-              <a:buNone/>
-            </a:pPr>
-            <a:r>
-              <a:rPr lang="en-US" sz="3200" b="1" dirty="0">
-                <a:solidFill>
-                  <a:srgbClr val="2C2926"/>
-                </a:solidFill>
-                <a:latin typeface="Pretendard" pitchFamily="34" charset="0"/>
-                <a:ea typeface="Pretendard" pitchFamily="34" charset="-122"/>
-                <a:cs typeface="Pretendard" pitchFamily="34" charset="-120"/>
-              </a:rPr>
-              <a:t>Skill + MCP 결합 — 정보조사 스킬에 이미지 생성 더하기</a:t>
-            </a:r>
-            <a:endParaRPr lang="en-US" sz="3200" dirty="0"/>
-          </a:p>
-        </p:txBody>
-      </p:sp>
-      <p:sp>
-        <p:nvSpPr>
-          <p:cNvPr id="4" name="Text 2"/>
-          <p:cNvSpPr/>
-          <p:nvPr/>
-        </p:nvSpPr>
-        <p:spPr>
-          <a:xfrm>
-            <a:off x="457200" y="1069848"/>
-            <a:ext cx="13716000" cy="365760"/>
-          </a:xfrm>
-          <a:prstGeom prst="rect">
-            <a:avLst/>
-          </a:prstGeom>
-          <a:noFill/>
-          <a:ln/>
-        </p:spPr>
-        <p:txBody>
-          <a:bodyPr wrap="square" rtlCol="0" anchor="ctr"/>
-          <a:lstStyle/>
-          <a:p>
-            <a:pPr marL="0" indent="0" algn="l">
-              <a:buNone/>
-            </a:pPr>
-            <a:r>
-              <a:rPr lang="en-US" sz="2000" b="1" dirty="0">
-                <a:solidFill>
-                  <a:srgbClr val="0D9488"/>
-                </a:solidFill>
-                <a:latin typeface="Pretendard" pitchFamily="34" charset="0"/>
-                <a:ea typeface="Pretendard" pitchFamily="34" charset="-122"/>
-                <a:cs typeface="Pretendard" pitchFamily="34" charset="-120"/>
-              </a:rPr>
-              <a:t>Skill(절차) + MCP(도구) = 레고 조합</a:t>
-            </a:r>
-            <a:endParaRPr lang="en-US" sz="2000" dirty="0"/>
-          </a:p>
-        </p:txBody>
-      </p:sp>
-      <p:sp>
-        <p:nvSpPr>
-          <p:cNvPr id="5" name="Text 3"/>
-          <p:cNvSpPr/>
-          <p:nvPr/>
-        </p:nvSpPr>
-        <p:spPr>
-          <a:xfrm>
-            <a:off x="457200" y="1463040"/>
-            <a:ext cx="13716000" cy="457200"/>
-          </a:xfrm>
-          <a:prstGeom prst="rect">
-            <a:avLst/>
-          </a:prstGeom>
-          <a:noFill/>
-          <a:ln/>
-        </p:spPr>
-        <p:txBody>
-          <a:bodyPr wrap="square" rtlCol="0" anchor="t"/>
-          <a:lstStyle/>
-          <a:p>
-            <a:pPr marL="0" indent="0" algn="l">
-              <a:lnSpc>
-                <a:spcPct val="108000"/>
-              </a:lnSpc>
-              <a:buNone/>
-            </a:pPr>
-            <a:r>
-              <a:rPr lang="en-US" sz="1700" b="1" dirty="0">
-                <a:solidFill>
-                  <a:srgbClr val="2C2926"/>
-                </a:solidFill>
-                <a:latin typeface="Pretendard" pitchFamily="34" charset="0"/>
-                <a:ea typeface="Pretendard" pitchFamily="34" charset="-122"/>
-                <a:cs typeface="Pretendard" pitchFamily="34" charset="-120"/>
-              </a:rPr>
-              <a:t>3회차에서 만든 정보조사 스킬에, 7번에서 만든 이미지 생성 MCP를 붙여 기능을 확장</a:t>
-            </a:r>
-            <a:endParaRPr lang="en-US" sz="1700" dirty="0"/>
-          </a:p>
-        </p:txBody>
-      </p:sp>
-      <p:sp>
-        <p:nvSpPr>
-          <p:cNvPr id="6" name="Text 4"/>
-          <p:cNvSpPr/>
-          <p:nvPr/>
-        </p:nvSpPr>
-        <p:spPr>
-          <a:xfrm>
-            <a:off x="457200" y="2103120"/>
-            <a:ext cx="6400800" cy="365760"/>
-          </a:xfrm>
-          <a:prstGeom prst="rect">
-            <a:avLst/>
-          </a:prstGeom>
-          <a:noFill/>
-          <a:ln/>
-        </p:spPr>
-        <p:txBody>
-          <a:bodyPr wrap="square" rtlCol="0" anchor="ctr"/>
-          <a:lstStyle/>
-          <a:p>
-            <a:pPr marL="0" indent="0" algn="l">
-              <a:buNone/>
-            </a:pPr>
-            <a:r>
-              <a:rPr lang="en-US" sz="1600" b="1" dirty="0">
-                <a:solidFill>
-                  <a:srgbClr val="2C2926"/>
-                </a:solidFill>
-                <a:latin typeface="Pretendard" pitchFamily="34" charset="0"/>
-                <a:ea typeface="Pretendard" pitchFamily="34" charset="-122"/>
-                <a:cs typeface="Pretendard" pitchFamily="34" charset="-120"/>
-              </a:rPr>
-              <a:t>확장 흐름</a:t>
-            </a:r>
-            <a:endParaRPr lang="en-US" sz="1600" dirty="0"/>
-          </a:p>
-        </p:txBody>
-      </p:sp>
-      <p:sp>
-        <p:nvSpPr>
-          <p:cNvPr id="7" name="Shape 5"/>
-          <p:cNvSpPr/>
-          <p:nvPr/>
-        </p:nvSpPr>
-        <p:spPr>
-          <a:xfrm>
-            <a:off x="457200" y="2514600"/>
-            <a:ext cx="6675120" cy="841248"/>
-          </a:xfrm>
-          <a:prstGeom prst="roundRect">
-            <a:avLst>
-              <a:gd name="adj" fmla="val 6522"/>
-            </a:avLst>
-          </a:prstGeom>
-          <a:solidFill>
-            <a:srgbClr val="059669"/>
-          </a:solidFill>
-          <a:ln/>
-        </p:spPr>
-        <p:txBody>
-          <a:bodyPr/>
-          <a:lstStyle/>
-          <a:p>
-            <a:endParaRPr lang="ko-KR" altLang="en-US"/>
-          </a:p>
-        </p:txBody>
-      </p:sp>
-      <p:sp>
-        <p:nvSpPr>
-          <p:cNvPr id="8" name="Text 6"/>
-          <p:cNvSpPr/>
-          <p:nvPr/>
-        </p:nvSpPr>
-        <p:spPr>
-          <a:xfrm>
-            <a:off x="457200" y="2514600"/>
-            <a:ext cx="6675120" cy="841248"/>
-          </a:xfrm>
-          <a:prstGeom prst="rect">
-            <a:avLst/>
-          </a:prstGeom>
-          <a:noFill/>
-          <a:ln/>
-        </p:spPr>
-        <p:txBody>
-          <a:bodyPr wrap="square" rtlCol="0" anchor="ctr"/>
-          <a:lstStyle/>
-          <a:p>
-            <a:pPr marL="0" indent="0" algn="ctr">
-              <a:buNone/>
-            </a:pPr>
-            <a:r>
-              <a:rPr lang="en-US" sz="1600" b="1" dirty="0">
-                <a:solidFill>
-                  <a:srgbClr val="FFFFFF"/>
-                </a:solidFill>
-                <a:latin typeface="Pretendard" pitchFamily="34" charset="0"/>
-                <a:ea typeface="Pretendard" pitchFamily="34" charset="-122"/>
-                <a:cs typeface="Pretendard" pitchFamily="34" charset="-120"/>
-              </a:rPr>
-              <a:t>① 기존: 정보조사 스킬 = 검색 → 레포트 → 슬라이드(지침)</a:t>
-            </a:r>
-            <a:endParaRPr lang="en-US" sz="1600" dirty="0"/>
-          </a:p>
-        </p:txBody>
-      </p:sp>
-      <p:sp>
-        <p:nvSpPr>
-          <p:cNvPr id="9" name="Shape 7"/>
-          <p:cNvSpPr/>
-          <p:nvPr/>
-        </p:nvSpPr>
-        <p:spPr>
-          <a:xfrm>
-            <a:off x="457200" y="3474720"/>
-            <a:ext cx="6675120" cy="841248"/>
-          </a:xfrm>
-          <a:prstGeom prst="roundRect">
-            <a:avLst>
-              <a:gd name="adj" fmla="val 6522"/>
-            </a:avLst>
-          </a:prstGeom>
-          <a:solidFill>
-            <a:srgbClr val="D97706"/>
-          </a:solidFill>
-          <a:ln/>
-        </p:spPr>
-        <p:txBody>
-          <a:bodyPr/>
-          <a:lstStyle/>
-          <a:p>
-            <a:endParaRPr lang="ko-KR" altLang="en-US"/>
-          </a:p>
-        </p:txBody>
-      </p:sp>
-      <p:sp>
-        <p:nvSpPr>
-          <p:cNvPr id="10" name="Text 8"/>
-          <p:cNvSpPr/>
-          <p:nvPr/>
-        </p:nvSpPr>
-        <p:spPr>
-          <a:xfrm>
-            <a:off x="457200" y="3474720"/>
-            <a:ext cx="6675120" cy="841248"/>
-          </a:xfrm>
-          <a:prstGeom prst="rect">
-            <a:avLst/>
-          </a:prstGeom>
-          <a:noFill/>
-          <a:ln/>
-        </p:spPr>
-        <p:txBody>
-          <a:bodyPr wrap="square" rtlCol="0" anchor="ctr"/>
-          <a:lstStyle/>
-          <a:p>
-            <a:pPr marL="0" indent="0" algn="ctr">
-              <a:buNone/>
-            </a:pPr>
-            <a:r>
-              <a:rPr lang="en-US" sz="1600" b="1" dirty="0">
-                <a:solidFill>
-                  <a:srgbClr val="FFFFFF"/>
-                </a:solidFill>
-                <a:latin typeface="Pretendard" pitchFamily="34" charset="0"/>
-                <a:ea typeface="Pretendard" pitchFamily="34" charset="-122"/>
-                <a:cs typeface="Pretendard" pitchFamily="34" charset="-120"/>
-              </a:rPr>
-              <a:t>② 추가: SKILL.md 본문에 "표지·삽화는 GPT Image MCP로 생성" 한 줄 추가</a:t>
-            </a:r>
-            <a:endParaRPr lang="en-US" sz="1600" dirty="0"/>
-          </a:p>
-        </p:txBody>
-      </p:sp>
-      <p:sp>
-        <p:nvSpPr>
-          <p:cNvPr id="11" name="Shape 9"/>
-          <p:cNvSpPr/>
-          <p:nvPr/>
-        </p:nvSpPr>
-        <p:spPr>
-          <a:xfrm>
-            <a:off x="457200" y="4434840"/>
-            <a:ext cx="6675120" cy="841248"/>
-          </a:xfrm>
-          <a:prstGeom prst="roundRect">
-            <a:avLst>
-              <a:gd name="adj" fmla="val 6522"/>
-            </a:avLst>
-          </a:prstGeom>
-          <a:solidFill>
-            <a:srgbClr val="059669"/>
-          </a:solidFill>
-          <a:ln/>
-        </p:spPr>
-        <p:txBody>
-          <a:bodyPr/>
-          <a:lstStyle/>
-          <a:p>
-            <a:endParaRPr lang="ko-KR" altLang="en-US"/>
-          </a:p>
-        </p:txBody>
-      </p:sp>
-      <p:sp>
-        <p:nvSpPr>
-          <p:cNvPr id="12" name="Text 10"/>
-          <p:cNvSpPr/>
-          <p:nvPr/>
-        </p:nvSpPr>
-        <p:spPr>
-          <a:xfrm>
-            <a:off x="457200" y="4434840"/>
-            <a:ext cx="6675120" cy="841248"/>
-          </a:xfrm>
-          <a:prstGeom prst="rect">
-            <a:avLst/>
-          </a:prstGeom>
-          <a:noFill/>
-          <a:ln/>
-        </p:spPr>
-        <p:txBody>
-          <a:bodyPr wrap="square" rtlCol="0" anchor="ctr"/>
-          <a:lstStyle/>
-          <a:p>
-            <a:pPr marL="0" indent="0" algn="ctr">
-              <a:buNone/>
-            </a:pPr>
-            <a:r>
-              <a:rPr lang="en-US" sz="1600" b="1" dirty="0">
-                <a:solidFill>
-                  <a:srgbClr val="FFFFFF"/>
-                </a:solidFill>
-                <a:latin typeface="Pretendard" pitchFamily="34" charset="0"/>
-                <a:ea typeface="Pretendard" pitchFamily="34" charset="-122"/>
-                <a:cs typeface="Pretendard" pitchFamily="34" charset="-120"/>
-              </a:rPr>
-              <a:t>③ 결과: 한 번의 호출로 조사 → 레포트 → 이미지까지 생성</a:t>
-            </a:r>
-            <a:endParaRPr lang="en-US" sz="1600" dirty="0"/>
-          </a:p>
-        </p:txBody>
-      </p:sp>
-      <p:sp>
-        <p:nvSpPr>
-          <p:cNvPr id="13" name="Text 11"/>
-          <p:cNvSpPr/>
-          <p:nvPr/>
-        </p:nvSpPr>
-        <p:spPr>
-          <a:xfrm>
-            <a:off x="7406640" y="2103120"/>
-            <a:ext cx="6400800" cy="365760"/>
-          </a:xfrm>
-          <a:prstGeom prst="rect">
-            <a:avLst/>
-          </a:prstGeom>
-          <a:noFill/>
-          <a:ln/>
-        </p:spPr>
-        <p:txBody>
-          <a:bodyPr wrap="square" rtlCol="0" anchor="ctr"/>
-          <a:lstStyle/>
-          <a:p>
-            <a:pPr marL="0" indent="0" algn="l">
-              <a:buNone/>
-            </a:pPr>
-            <a:r>
-              <a:rPr lang="en-US" sz="1600" b="1" dirty="0">
-                <a:solidFill>
-                  <a:srgbClr val="2C2926"/>
-                </a:solidFill>
-                <a:latin typeface="Pretendard" pitchFamily="34" charset="0"/>
-                <a:ea typeface="Pretendard" pitchFamily="34" charset="-122"/>
-                <a:cs typeface="Pretendard" pitchFamily="34" charset="-120"/>
-              </a:rPr>
-              <a:t>SKILL.md에 추가하는 지침</a:t>
-            </a:r>
-            <a:endParaRPr lang="en-US" sz="1600" dirty="0"/>
-          </a:p>
-        </p:txBody>
-      </p:sp>
-      <p:sp>
-        <p:nvSpPr>
-          <p:cNvPr id="14" name="Shape 12"/>
-          <p:cNvSpPr/>
-          <p:nvPr/>
-        </p:nvSpPr>
-        <p:spPr>
-          <a:xfrm>
-            <a:off x="7406640" y="2514600"/>
-            <a:ext cx="6766560" cy="1828800"/>
-          </a:xfrm>
-          <a:prstGeom prst="roundRect">
-            <a:avLst>
-              <a:gd name="adj" fmla="val 3000"/>
-            </a:avLst>
-          </a:prstGeom>
-          <a:solidFill>
-            <a:srgbClr val="F5F5F7"/>
-          </a:solidFill>
-          <a:ln w="12700">
-            <a:solidFill>
-              <a:srgbClr val="DDDDE0"/>
-            </a:solidFill>
-            <a:prstDash val="solid"/>
-          </a:ln>
-        </p:spPr>
-        <p:txBody>
-          <a:bodyPr/>
-          <a:lstStyle/>
-          <a:p>
-            <a:endParaRPr lang="ko-KR" altLang="en-US"/>
-          </a:p>
-        </p:txBody>
-      </p:sp>
-      <p:sp>
-        <p:nvSpPr>
-          <p:cNvPr id="15" name="Text 13"/>
-          <p:cNvSpPr/>
-          <p:nvPr/>
-        </p:nvSpPr>
-        <p:spPr>
-          <a:xfrm>
-            <a:off x="7571232" y="2624328"/>
-            <a:ext cx="6437376" cy="1609344"/>
-          </a:xfrm>
-          <a:prstGeom prst="rect">
-            <a:avLst/>
-          </a:prstGeom>
-          <a:noFill/>
-          <a:ln/>
-        </p:spPr>
-        <p:txBody>
-          <a:bodyPr wrap="square" rtlCol="0" anchor="t"/>
-          <a:lstStyle/>
-          <a:p>
-            <a:pPr marL="0" indent="0" algn="l">
-              <a:lnSpc>
-                <a:spcPct val="112000"/>
-              </a:lnSpc>
-              <a:buNone/>
-            </a:pPr>
-            <a:r>
-              <a:rPr lang="en-US" sz="1600" dirty="0">
-                <a:solidFill>
-                  <a:srgbClr val="2C2926"/>
-                </a:solidFill>
-                <a:latin typeface="Consolas" pitchFamily="34" charset="0"/>
-                <a:ea typeface="Consolas" pitchFamily="34" charset="-122"/>
-                <a:cs typeface="Consolas" pitchFamily="34" charset="-120"/>
-              </a:rPr>
-              <a:t>## 작업방법(추가)</a:t>
-            </a:r>
-            <a:endParaRPr lang="en-US" sz="1600" dirty="0"/>
-          </a:p>
-          <a:p>
-            <a:pPr marL="0" indent="0" algn="l">
-              <a:lnSpc>
-                <a:spcPct val="112000"/>
-              </a:lnSpc>
-              <a:buNone/>
-            </a:pPr>
-            <a:r>
-              <a:rPr lang="en-US" sz="1600" dirty="0">
-                <a:solidFill>
-                  <a:srgbClr val="2C2926"/>
-                </a:solidFill>
-                <a:latin typeface="Consolas" pitchFamily="34" charset="0"/>
-                <a:ea typeface="Consolas" pitchFamily="34" charset="-122"/>
-                <a:cs typeface="Consolas" pitchFamily="34" charset="-120"/>
-              </a:rPr>
-              <a:t>4. 레포트 핵심 장면을 그림으로 표현</a:t>
-            </a:r>
-            <a:endParaRPr lang="en-US" sz="1600" dirty="0"/>
-          </a:p>
-          <a:p>
-            <a:pPr marL="0" indent="0" algn="l">
-              <a:lnSpc>
-                <a:spcPct val="112000"/>
-              </a:lnSpc>
-              <a:buNone/>
-            </a:pPr>
-            <a:r>
-              <a:rPr lang="en-US" sz="1600" dirty="0">
-                <a:solidFill>
-                  <a:srgbClr val="2C2926"/>
-                </a:solidFill>
-                <a:latin typeface="Consolas" pitchFamily="34" charset="0"/>
-                <a:ea typeface="Consolas" pitchFamily="34" charset="-122"/>
-                <a:cs typeface="Consolas" pitchFamily="34" charset="-120"/>
-              </a:rPr>
-              <a:t>5. GPT Image MCP로 표지 이미지 1장 생성</a:t>
-            </a:r>
-            <a:endParaRPr lang="en-US" sz="1600" dirty="0"/>
-          </a:p>
-          <a:p>
-            <a:pPr marL="0" indent="0" algn="l">
-              <a:lnSpc>
-                <a:spcPct val="112000"/>
-              </a:lnSpc>
-              <a:buNone/>
-            </a:pPr>
-            <a:r>
-              <a:rPr lang="en-US" sz="1600" dirty="0">
-                <a:solidFill>
-                  <a:srgbClr val="2C2926"/>
-                </a:solidFill>
-                <a:latin typeface="Consolas" pitchFamily="34" charset="0"/>
-                <a:ea typeface="Consolas" pitchFamily="34" charset="-122"/>
-                <a:cs typeface="Consolas" pitchFamily="34" charset="-120"/>
-              </a:rPr>
-              <a:t>6. 생성 이미지를 슬라이드에 삽입</a:t>
-            </a:r>
-            <a:endParaRPr lang="en-US" sz="1600" dirty="0"/>
-          </a:p>
-        </p:txBody>
-      </p:sp>
-      <p:sp>
-        <p:nvSpPr>
-          <p:cNvPr id="16" name="Shape 14"/>
-          <p:cNvSpPr/>
-          <p:nvPr/>
-        </p:nvSpPr>
-        <p:spPr>
-          <a:xfrm>
-            <a:off x="457200" y="5577840"/>
-            <a:ext cx="13716000" cy="685800"/>
-          </a:xfrm>
-          <a:prstGeom prst="roundRect">
-            <a:avLst>
-              <a:gd name="adj" fmla="val 10667"/>
-            </a:avLst>
-          </a:prstGeom>
-          <a:solidFill>
-            <a:srgbClr val="CCFBF1"/>
-          </a:solidFill>
-          <a:ln/>
-        </p:spPr>
-        <p:txBody>
-          <a:bodyPr/>
-          <a:lstStyle/>
-          <a:p>
-            <a:endParaRPr lang="ko-KR" altLang="en-US"/>
-          </a:p>
-        </p:txBody>
-      </p:sp>
-      <p:sp>
-        <p:nvSpPr>
-          <p:cNvPr id="17" name="Text 15"/>
-          <p:cNvSpPr/>
-          <p:nvPr/>
-        </p:nvSpPr>
-        <p:spPr>
-          <a:xfrm>
-            <a:off x="640080" y="5577840"/>
-            <a:ext cx="13350240" cy="685800"/>
-          </a:xfrm>
-          <a:prstGeom prst="rect">
-            <a:avLst/>
-          </a:prstGeom>
-          <a:noFill/>
-          <a:ln/>
-        </p:spPr>
-        <p:txBody>
-          <a:bodyPr wrap="square" rtlCol="0" anchor="ctr"/>
-          <a:lstStyle/>
-          <a:p>
-            <a:pPr marL="0" indent="0" algn="l">
-              <a:lnSpc>
-                <a:spcPct val="105000"/>
-              </a:lnSpc>
-              <a:buNone/>
-            </a:pPr>
-            <a:r>
-              <a:rPr lang="en-US" sz="1600" b="1" dirty="0">
-                <a:solidFill>
-                  <a:srgbClr val="2C2926"/>
-                </a:solidFill>
-                <a:latin typeface="Pretendard" pitchFamily="34" charset="0"/>
-                <a:ea typeface="Pretendard" pitchFamily="34" charset="-122"/>
-                <a:cs typeface="Pretendard" pitchFamily="34" charset="-120"/>
-              </a:rPr>
-              <a:t>핵심: Skill(절차) + MCP(도구)는 레고처럼 조합 — 같은 방식으로 Playwright MCP를 붙이면 "웹 조회 Skill"(다음 실습)이 됩니다.</a:t>
-            </a:r>
-            <a:endParaRPr lang="en-US" sz="1600" dirty="0"/>
-          </a:p>
-        </p:txBody>
-      </p:sp>
-      <p:sp>
-        <p:nvSpPr>
-          <p:cNvPr id="25" name="Slide Number Placeholder 0"/>
-          <p:cNvSpPr>
-            <a:spLocks noGrp="1"/>
-          </p:cNvSpPr>
-          <p:nvPr>
-            <p:ph type="sldNum" sz="quarter" idx="4294967295"/>
-          </p:nvPr>
-        </p:nvSpPr>
-        <p:spPr>
-          <a:xfrm>
-            <a:off x="13624560" y="7863840"/>
-            <a:ext cx="548640" cy="274320"/>
-          </a:xfrm>
-          <a:prstGeom prst="rect">
-            <a:avLst/>
-          </a:prstGeom>
-          <a:extLst>
-            <a:ext uri="{C572A759-6A51-4108-AA02-DFA0A04FC94B}">
-              <ma14:wrappingTextBoxFlag xmlns:ma14="http://schemas.microsoft.com/office/mac/drawingml/2011/main" xmlns="" val="0"/>
-            </a:ext>
-          </a:extLst>
-        </p:spPr>
-        <p:txBody>
-          <a:bodyPr/>
-          <a:lstStyle>
-            <a:lvl1pPr>
-              <a:defRPr sz="1600">
-                <a:solidFill>
-                  <a:srgbClr val="6B6B7B"/>
-                </a:solidFill>
-                <a:latin typeface="Pretendard"/>
-                <a:ea typeface="Pretendard"/>
-                <a:cs typeface="Pretendard"/>
-              </a:defRPr>
-            </a:lvl1pPr>
-          </a:lstStyle>
-          <a:p>
-            <a:pPr algn="r"/>
-            <a:fld id="{F7021451-1387-4CA6-816F-3879F97B5CBC}" type="slidenum">
-              <a:rPr lang="en-US" b="0"/>
-              <a:t>14</a:t>
-            </a:fld>
-            <a:endParaRPr lang="en-US"/>
-          </a:p>
-        </p:txBody>
-      </p:sp>
-    </p:spTree>
-  </p:cSld>
-  <p:clrMapOvr>
-    <a:masterClrMapping/>
-  </p:clrMapOvr>
-</p:sld>
-</file>
-
-<file path=ppt/slides/slide15.xml><?xml version="1.0" encoding="utf-8"?>
 <p:sld xmlns:a="http://schemas.openxmlformats.org/drawingml/2006/main" xmlns:r="http://schemas.openxmlformats.org/officeDocument/2006/relationships" xmlns:p="http://schemas.openxmlformats.org/presentationml/2006/main">
   <p:cSld name="Slide 9">
     <p:spTree>
@@ -12202,7 +11997,7 @@
         <p:spPr>
           <a:xfrm>
             <a:off x="457200" y="2103120"/>
-            <a:ext cx="4434840" cy="3017520"/>
+            <a:ext cx="4434840" cy="4011930"/>
           </a:xfrm>
           <a:prstGeom prst="roundRect">
             <a:avLst>
@@ -12289,7 +12084,18 @@
                 <a:ea typeface="Pretendard" pitchFamily="34" charset="-122"/>
                 <a:cs typeface="Pretendard" pitchFamily="34" charset="-120"/>
               </a:rPr>
-              <a:t>① 웹 조회 Skill [직접]</a:t>
+              <a:t>① Cloud LLM API Key </a:t>
+            </a:r>
+            <a:r>
+              <a:rPr lang="ko-KR" altLang="en-US" sz="1600" b="1" dirty="0">
+                <a:solidFill>
+                  <a:srgbClr val="FFFFFF"/>
+                </a:solidFill>
+                <a:latin typeface="Pretendard" pitchFamily="34" charset="0"/>
+                <a:ea typeface="Pretendard" pitchFamily="34" charset="-122"/>
+                <a:cs typeface="Pretendard" pitchFamily="34" charset="-120"/>
+              </a:rPr>
+              <a:t>발행</a:t>
             </a:r>
             <a:endParaRPr lang="en-US" sz="1600" dirty="0"/>
           </a:p>
@@ -12303,8 +12109,8 @@
         </p:nvSpPr>
         <p:spPr>
           <a:xfrm>
-            <a:off x="658368" y="2724912"/>
-            <a:ext cx="4032504" cy="2286000"/>
+            <a:off x="658368" y="2724911"/>
+            <a:ext cx="4032504" cy="3197257"/>
           </a:xfrm>
           <a:prstGeom prst="rect">
             <a:avLst/>
@@ -12316,7 +12122,7 @@
           <a:bodyPr wrap="square" rtlCol="0" anchor="t"/>
           <a:lstStyle/>
           <a:p>
-            <a:pPr marL="177800" indent="-177800" algn="l">
+            <a:pPr marL="177800" indent="-177800">
               <a:lnSpc>
                 <a:spcPct val="105000"/>
               </a:lnSpc>
@@ -12327,17 +12133,74 @@
               <a:buChar char="•"/>
             </a:pPr>
             <a:r>
-              <a:rPr lang="en-US" sz="1600" dirty="0">
-                <a:solidFill>
-                  <a:srgbClr val="505060"/>
-                </a:solidFill>
+              <a:rPr lang="en-US" altLang="ko-KR" sz="1600" dirty="0">
                 <a:latin typeface="Pretendard" pitchFamily="34" charset="0"/>
                 <a:ea typeface="Pretendard" pitchFamily="34" charset="-122"/>
                 <a:cs typeface="Pretendard" pitchFamily="34" charset="-120"/>
               </a:rPr>
-              <a:t>Playwright MCP로</a:t>
-            </a:r>
-            <a:endParaRPr lang="en-US" sz="1600" dirty="0"/>
+              <a:t>Claude in Chrome</a:t>
+            </a:r>
+            <a:r>
+              <a:rPr lang="en-US" sz="1600" dirty="0">
+                <a:latin typeface="Pretendard" pitchFamily="34" charset="0"/>
+                <a:ea typeface="Pretendard" pitchFamily="34" charset="-122"/>
+                <a:cs typeface="Pretendard" pitchFamily="34" charset="-120"/>
+              </a:rPr>
+              <a:t> </a:t>
+            </a:r>
+            <a:r>
+              <a:rPr lang="en-US" sz="1600" dirty="0" err="1">
+                <a:latin typeface="Pretendard" pitchFamily="34" charset="0"/>
+                <a:ea typeface="Pretendard" pitchFamily="34" charset="-122"/>
+                <a:cs typeface="Pretendard" pitchFamily="34" charset="-120"/>
+              </a:rPr>
+              <a:t>MCP로</a:t>
+            </a:r>
+            <a:r>
+              <a:rPr lang="en-US" sz="1600" dirty="0">
+                <a:latin typeface="Pretendard" pitchFamily="34" charset="0"/>
+                <a:ea typeface="Pretendard" pitchFamily="34" charset="-122"/>
+                <a:cs typeface="Pretendard" pitchFamily="34" charset="-120"/>
+              </a:rPr>
+              <a:t> </a:t>
+            </a:r>
+            <a:r>
+              <a:rPr lang="en-US" altLang="ko-KR" sz="1600" dirty="0">
+                <a:latin typeface="Pretendard" pitchFamily="34" charset="0"/>
+                <a:ea typeface="Pretendard" pitchFamily="34" charset="-122"/>
+                <a:cs typeface="Pretendard" pitchFamily="34" charset="-120"/>
+              </a:rPr>
+              <a:t>API</a:t>
+            </a:r>
+            <a:r>
+              <a:rPr lang="ko-KR" altLang="en-US" sz="1600" dirty="0">
+                <a:latin typeface="Pretendard" pitchFamily="34" charset="0"/>
+                <a:ea typeface="Pretendard" pitchFamily="34" charset="-122"/>
+                <a:cs typeface="Pretendard" pitchFamily="34" charset="-120"/>
+              </a:rPr>
+              <a:t> 발행 대상 서비스를 입력하면</a:t>
+            </a:r>
+            <a:r>
+              <a:rPr lang="en-US" sz="1600" dirty="0">
+                <a:latin typeface="Pretendard" pitchFamily="34" charset="0"/>
+                <a:ea typeface="Pretendard" pitchFamily="34" charset="-122"/>
+                <a:cs typeface="Pretendard" pitchFamily="34" charset="-120"/>
+              </a:rPr>
+              <a:t> </a:t>
+            </a:r>
+            <a:r>
+              <a:rPr lang="ko-KR" altLang="en-US" sz="1600" dirty="0">
+                <a:latin typeface="Pretendard" pitchFamily="34" charset="0"/>
+                <a:ea typeface="Pretendard" pitchFamily="34" charset="-122"/>
+                <a:cs typeface="Pretendard" pitchFamily="34" charset="-120"/>
+              </a:rPr>
+              <a:t>발행하는 프롬프트 작성</a:t>
+            </a:r>
+            <a:endParaRPr lang="en-US" altLang="ko-KR" sz="1600" dirty="0">
+              <a:latin typeface="Pretendard" pitchFamily="34" charset="0"/>
+              <a:ea typeface="Pretendard" pitchFamily="34" charset="-122"/>
+              <a:cs typeface="Pretendard" pitchFamily="34" charset="-120"/>
+            </a:endParaRPr>
           </a:p>
           <a:p>
             <a:pPr marL="177800" indent="-177800" algn="l">
@@ -12351,17 +12214,18 @@
               <a:buChar char="•"/>
             </a:pPr>
             <a:r>
-              <a:rPr lang="en-US" sz="1600" dirty="0">
-                <a:solidFill>
-                  <a:srgbClr val="505060"/>
-                </a:solidFill>
+              <a:rPr lang="ko-KR" altLang="en-US" sz="1600" dirty="0">
                 <a:latin typeface="Pretendard" pitchFamily="34" charset="0"/>
                 <a:ea typeface="Pretendard" pitchFamily="34" charset="-122"/>
                 <a:cs typeface="Pretendard" pitchFamily="34" charset="-120"/>
               </a:rPr>
-              <a:t>공개 웹의 정보 한 가지를 조회·정리하는 Skill을 만듦</a:t>
-            </a:r>
-            <a:endParaRPr lang="en-US" sz="1600" dirty="0"/>
+              <a:t>프롬프트를 이용하여 스킬로 개발</a:t>
+            </a:r>
+            <a:endParaRPr lang="en-US" altLang="ko-KR" sz="1600" dirty="0">
+              <a:latin typeface="Pretendard" pitchFamily="34" charset="0"/>
+              <a:ea typeface="Pretendard" pitchFamily="34" charset="-122"/>
+              <a:cs typeface="Pretendard" pitchFamily="34" charset="-120"/>
+            </a:endParaRPr>
           </a:p>
           <a:p>
             <a:pPr marL="177800" indent="-177800" algn="l">
@@ -12376,14 +12240,94 @@
             </a:pPr>
             <a:r>
               <a:rPr lang="en-US" sz="1600" dirty="0">
-                <a:solidFill>
-                  <a:srgbClr val="505060"/>
-                </a:solidFill>
                 <a:latin typeface="Pretendard" pitchFamily="34" charset="0"/>
                 <a:ea typeface="Pretendard" pitchFamily="34" charset="-122"/>
                 <a:cs typeface="Pretendard" pitchFamily="34" charset="-120"/>
               </a:rPr>
-              <a:t>→ /웹조회 로 호출</a:t>
+              <a:t>API </a:t>
+            </a:r>
+            <a:r>
+              <a:rPr lang="ko-KR" altLang="en-US" sz="1600" dirty="0">
+                <a:latin typeface="Pretendard" pitchFamily="34" charset="0"/>
+                <a:ea typeface="Pretendard" pitchFamily="34" charset="-122"/>
+                <a:cs typeface="Pretendard" pitchFamily="34" charset="-120"/>
+              </a:rPr>
+              <a:t>발생 서비스 예</a:t>
+            </a:r>
+            <a:r>
+              <a:rPr lang="en-US" altLang="ko-KR" sz="1600" dirty="0">
+                <a:latin typeface="Pretendard" pitchFamily="34" charset="0"/>
+                <a:ea typeface="Pretendard" pitchFamily="34" charset="-122"/>
+                <a:cs typeface="Pretendard" pitchFamily="34" charset="-120"/>
+              </a:rPr>
+              <a:t>: OpenAI, Claude, Gemini, </a:t>
+            </a:r>
+            <a:r>
+              <a:rPr lang="en-US" altLang="ko-KR" sz="1600" dirty="0" err="1">
+                <a:latin typeface="Pretendard" pitchFamily="34" charset="0"/>
+                <a:ea typeface="Pretendard" pitchFamily="34" charset="-122"/>
+                <a:cs typeface="Pretendard" pitchFamily="34" charset="-120"/>
+              </a:rPr>
+              <a:t>Groq</a:t>
+            </a:r>
+            <a:r>
+              <a:rPr lang="en-US" altLang="ko-KR" sz="1600" dirty="0">
+                <a:latin typeface="Pretendard" pitchFamily="34" charset="0"/>
+                <a:ea typeface="Pretendard" pitchFamily="34" charset="-122"/>
+                <a:cs typeface="Pretendard" pitchFamily="34" charset="-120"/>
+              </a:rPr>
+              <a:t>,  Google Place, Google Data API </a:t>
+            </a:r>
+            <a:r>
+              <a:rPr lang="ko-KR" altLang="en-US" sz="1600" dirty="0">
+                <a:latin typeface="Pretendard" pitchFamily="34" charset="0"/>
+                <a:ea typeface="Pretendard" pitchFamily="34" charset="-122"/>
+                <a:cs typeface="Pretendard" pitchFamily="34" charset="-120"/>
+              </a:rPr>
+              <a:t>등</a:t>
+            </a:r>
+            <a:endParaRPr lang="en-US" altLang="ko-KR" sz="1600" dirty="0">
+              <a:latin typeface="Pretendard" pitchFamily="34" charset="0"/>
+              <a:ea typeface="Pretendard" pitchFamily="34" charset="-122"/>
+              <a:cs typeface="Pretendard" pitchFamily="34" charset="-120"/>
+            </a:endParaRPr>
+          </a:p>
+          <a:p>
+            <a:pPr marL="177800" indent="-177800" algn="l">
+              <a:lnSpc>
+                <a:spcPct val="105000"/>
+              </a:lnSpc>
+              <a:spcAft>
+                <a:spcPts val="800"/>
+              </a:spcAft>
+              <a:buSzPct val="100000"/>
+              <a:buChar char="•"/>
+            </a:pPr>
+            <a:r>
+              <a:rPr lang="ko-KR" altLang="en-US" sz="1600" dirty="0">
+                <a:latin typeface="Pretendard" pitchFamily="34" charset="0"/>
+                <a:ea typeface="Pretendard" pitchFamily="34" charset="-122"/>
+                <a:cs typeface="Pretendard" pitchFamily="34" charset="-120"/>
+              </a:rPr>
+              <a:t>스킬은 작업 디렉토리 작성 후</a:t>
+            </a:r>
+            <a:r>
+              <a:rPr lang="en-US" altLang="ko-KR" sz="1600" dirty="0">
+                <a:latin typeface="Pretendard" pitchFamily="34" charset="0"/>
+                <a:ea typeface="Pretendard" pitchFamily="34" charset="-122"/>
+                <a:cs typeface="Pretendard" pitchFamily="34" charset="-120"/>
+                <a:sym typeface="Wingdings" panose="05000000000000000000" pitchFamily="2" charset="2"/>
+              </a:rPr>
+              <a:t> </a:t>
+            </a:r>
+            <a:r>
+              <a:rPr lang="ko-KR" altLang="en-US" sz="1600" dirty="0">
+                <a:latin typeface="Pretendard" pitchFamily="34" charset="0"/>
+                <a:ea typeface="Pretendard" pitchFamily="34" charset="-122"/>
+                <a:cs typeface="Pretendard" pitchFamily="34" charset="-120"/>
+                <a:sym typeface="Wingdings" panose="05000000000000000000" pitchFamily="2" charset="2"/>
+              </a:rPr>
+              <a:t>시스템 프롬프트 구성하여 수행</a:t>
             </a:r>
             <a:endParaRPr lang="en-US" sz="1600" dirty="0"/>
           </a:p>
@@ -12398,7 +12342,7 @@
         <p:spPr>
           <a:xfrm>
             <a:off x="5093208" y="2103120"/>
-            <a:ext cx="4434840" cy="3017520"/>
+            <a:ext cx="4434840" cy="4011930"/>
           </a:xfrm>
           <a:prstGeom prst="roundRect">
             <a:avLst>
@@ -12485,7 +12429,40 @@
                 <a:ea typeface="Pretendard" pitchFamily="34" charset="-122"/>
                 <a:cs typeface="Pretendard" pitchFamily="34" charset="-120"/>
               </a:rPr>
-              <a:t>② 논문 요약 [데모]</a:t>
+              <a:t>② </a:t>
+            </a:r>
+            <a:r>
+              <a:rPr lang="en-US" sz="1600" b="1" dirty="0" err="1">
+                <a:solidFill>
+                  <a:srgbClr val="FFFFFF"/>
+                </a:solidFill>
+                <a:latin typeface="Pretendard" pitchFamily="34" charset="0"/>
+                <a:ea typeface="Pretendard" pitchFamily="34" charset="-122"/>
+                <a:cs typeface="Pretendard" pitchFamily="34" charset="-120"/>
+              </a:rPr>
+              <a:t>논문</a:t>
+            </a:r>
+            <a:r>
+              <a:rPr lang="en-US" sz="1600" b="1" dirty="0">
+                <a:solidFill>
+                  <a:srgbClr val="FFFFFF"/>
+                </a:solidFill>
+                <a:latin typeface="Pretendard" pitchFamily="34" charset="0"/>
+                <a:ea typeface="Pretendard" pitchFamily="34" charset="-122"/>
+                <a:cs typeface="Pretendard" pitchFamily="34" charset="-120"/>
+              </a:rPr>
+              <a:t> </a:t>
+            </a:r>
+            <a:r>
+              <a:rPr lang="en-US" sz="1600" b="1" dirty="0" err="1">
+                <a:solidFill>
+                  <a:srgbClr val="FFFFFF"/>
+                </a:solidFill>
+                <a:latin typeface="Pretendard" pitchFamily="34" charset="0"/>
+                <a:ea typeface="Pretendard" pitchFamily="34" charset="-122"/>
+                <a:cs typeface="Pretendard" pitchFamily="34" charset="-120"/>
+              </a:rPr>
+              <a:t>요약</a:t>
             </a:r>
             <a:endParaRPr lang="en-US" sz="1600" dirty="0"/>
           </a:p>
@@ -12499,8 +12476,8 @@
         </p:nvSpPr>
         <p:spPr>
           <a:xfrm>
-            <a:off x="5294376" y="2724912"/>
-            <a:ext cx="4032504" cy="2286000"/>
+            <a:off x="5294376" y="2724911"/>
+            <a:ext cx="4032504" cy="3197257"/>
           </a:xfrm>
           <a:prstGeom prst="rect">
             <a:avLst/>
@@ -12524,16 +12501,169 @@
             </a:pPr>
             <a:r>
               <a:rPr lang="en-US" sz="1600" dirty="0">
-                <a:solidFill>
-                  <a:srgbClr val="505060"/>
-                </a:solidFill>
                 <a:latin typeface="Pretendard" pitchFamily="34" charset="0"/>
                 <a:ea typeface="Pretendard" pitchFamily="34" charset="-122"/>
                 <a:cs typeface="Pretendard" pitchFamily="34" charset="-120"/>
               </a:rPr>
-              <a:t>Claude in Chrome으로</a:t>
-            </a:r>
-            <a:endParaRPr lang="en-US" sz="1600" dirty="0"/>
+              <a:t>Playwright </a:t>
+            </a:r>
+            <a:r>
+              <a:rPr lang="en-US" sz="1600" dirty="0" err="1">
+                <a:latin typeface="Pretendard" pitchFamily="34" charset="0"/>
+                <a:ea typeface="Pretendard" pitchFamily="34" charset="-122"/>
+                <a:cs typeface="Pretendard" pitchFamily="34" charset="-120"/>
+              </a:rPr>
+              <a:t>MCP로</a:t>
+            </a:r>
+            <a:r>
+              <a:rPr lang="en-US" sz="1600" dirty="0">
+                <a:latin typeface="Pretendard" pitchFamily="34" charset="0"/>
+                <a:ea typeface="Pretendard" pitchFamily="34" charset="-122"/>
+                <a:cs typeface="Pretendard" pitchFamily="34" charset="-120"/>
+              </a:rPr>
+              <a:t> </a:t>
+            </a:r>
+            <a:r>
+              <a:rPr lang="en-US" sz="1600" dirty="0" err="1">
+                <a:latin typeface="Pretendard" pitchFamily="34" charset="0"/>
+                <a:ea typeface="Pretendard" pitchFamily="34" charset="-122"/>
+                <a:cs typeface="Pretendard" pitchFamily="34" charset="-120"/>
+              </a:rPr>
+              <a:t>아카이브</a:t>
+            </a:r>
+            <a:r>
+              <a:rPr lang="en-US" sz="1600" dirty="0">
+                <a:latin typeface="Pretendard" pitchFamily="34" charset="0"/>
+                <a:ea typeface="Pretendard" pitchFamily="34" charset="-122"/>
+                <a:cs typeface="Pretendard" pitchFamily="34" charset="-120"/>
+              </a:rPr>
+              <a:t> </a:t>
+            </a:r>
+            <a:r>
+              <a:rPr lang="ko-KR" altLang="en-US" sz="1600" dirty="0">
+                <a:latin typeface="Pretendard" pitchFamily="34" charset="0"/>
+                <a:ea typeface="Pretendard" pitchFamily="34" charset="-122"/>
+                <a:cs typeface="Pretendard" pitchFamily="34" charset="-120"/>
+              </a:rPr>
+              <a:t>또는 </a:t>
+            </a:r>
+            <a:r>
+              <a:rPr lang="en-US" altLang="ko-KR" sz="1600" dirty="0">
+                <a:latin typeface="Pretendard" pitchFamily="34" charset="0"/>
+                <a:ea typeface="Pretendard" pitchFamily="34" charset="-122"/>
+                <a:cs typeface="Pretendard" pitchFamily="34" charset="-120"/>
+              </a:rPr>
+              <a:t>Google </a:t>
+            </a:r>
+            <a:r>
+              <a:rPr lang="en-US" altLang="ko-KR" sz="1600" dirty="0" err="1">
+                <a:latin typeface="Pretendard" pitchFamily="34" charset="0"/>
+                <a:ea typeface="Pretendard" pitchFamily="34" charset="-122"/>
+                <a:cs typeface="Pretendard" pitchFamily="34" charset="-120"/>
+              </a:rPr>
+              <a:t>Scholar</a:t>
+            </a:r>
+            <a:r>
+              <a:rPr lang="en-US" sz="1600" dirty="0" err="1">
+                <a:latin typeface="Pretendard" pitchFamily="34" charset="0"/>
+                <a:ea typeface="Pretendard" pitchFamily="34" charset="-122"/>
+                <a:cs typeface="Pretendard" pitchFamily="34" charset="-120"/>
+              </a:rPr>
+              <a:t>에서</a:t>
+            </a:r>
+            <a:r>
+              <a:rPr lang="en-US" sz="1600" dirty="0">
+                <a:latin typeface="Pretendard" pitchFamily="34" charset="0"/>
+                <a:ea typeface="Pretendard" pitchFamily="34" charset="-122"/>
+                <a:cs typeface="Pretendard" pitchFamily="34" charset="-120"/>
+              </a:rPr>
+              <a:t> </a:t>
+            </a:r>
+            <a:r>
+              <a:rPr lang="ko-KR" altLang="en-US" sz="1600" dirty="0">
+                <a:latin typeface="Pretendard" pitchFamily="34" charset="0"/>
+                <a:ea typeface="Pretendard" pitchFamily="34" charset="-122"/>
+                <a:cs typeface="Pretendard" pitchFamily="34" charset="-120"/>
+              </a:rPr>
+              <a:t>특정 키워드</a:t>
+            </a:r>
+            <a:r>
+              <a:rPr lang="en-US" sz="1600" dirty="0">
+                <a:latin typeface="Pretendard" pitchFamily="34" charset="0"/>
+                <a:ea typeface="Pretendard" pitchFamily="34" charset="-122"/>
+                <a:cs typeface="Pretendard" pitchFamily="34" charset="-120"/>
+              </a:rPr>
+              <a:t> 논문 </a:t>
+            </a:r>
+            <a:r>
+              <a:rPr lang="en-US" sz="1600" dirty="0" err="1">
+                <a:latin typeface="Pretendard" pitchFamily="34" charset="0"/>
+                <a:ea typeface="Pretendard" pitchFamily="34" charset="-122"/>
+                <a:cs typeface="Pretendard" pitchFamily="34" charset="-120"/>
+              </a:rPr>
+              <a:t>검색</a:t>
+            </a:r>
+            <a:r>
+              <a:rPr lang="en-US" sz="1600" dirty="0">
+                <a:latin typeface="Pretendard" pitchFamily="34" charset="0"/>
+                <a:ea typeface="Pretendard" pitchFamily="34" charset="-122"/>
+                <a:cs typeface="Pretendard" pitchFamily="34" charset="-120"/>
+              </a:rPr>
+              <a:t> </a:t>
+            </a:r>
+            <a:r>
+              <a:rPr lang="ko-KR" altLang="en-US" sz="1600" dirty="0">
+                <a:latin typeface="Pretendard" pitchFamily="34" charset="0"/>
+                <a:ea typeface="Pretendard" pitchFamily="34" charset="-122"/>
+                <a:cs typeface="Pretendard" pitchFamily="34" charset="-120"/>
+              </a:rPr>
+              <a:t>하여</a:t>
+            </a:r>
+            <a:r>
+              <a:rPr lang="en-US" sz="1600" dirty="0">
+                <a:latin typeface="Pretendard" pitchFamily="34" charset="0"/>
+                <a:ea typeface="Pretendard" pitchFamily="34" charset="-122"/>
+                <a:cs typeface="Pretendard" pitchFamily="34" charset="-120"/>
+              </a:rPr>
+              <a:t> </a:t>
+            </a:r>
+            <a:r>
+              <a:rPr lang="en-US" sz="1600" dirty="0" err="1">
+                <a:latin typeface="Pretendard" pitchFamily="34" charset="0"/>
+                <a:ea typeface="Pretendard" pitchFamily="34" charset="-122"/>
+                <a:cs typeface="Pretendard" pitchFamily="34" charset="-120"/>
+              </a:rPr>
+              <a:t>제목·초록</a:t>
+            </a:r>
+            <a:r>
+              <a:rPr lang="en-US" sz="1600" dirty="0">
+                <a:latin typeface="Pretendard" pitchFamily="34" charset="0"/>
+                <a:ea typeface="Pretendard" pitchFamily="34" charset="-122"/>
+                <a:cs typeface="Pretendard" pitchFamily="34" charset="-120"/>
+              </a:rPr>
+              <a:t> </a:t>
+            </a:r>
+            <a:r>
+              <a:rPr lang="en-US" sz="1600" dirty="0" err="1">
+                <a:latin typeface="Pretendard" pitchFamily="34" charset="0"/>
+                <a:ea typeface="Pretendard" pitchFamily="34" charset="-122"/>
+                <a:cs typeface="Pretendard" pitchFamily="34" charset="-120"/>
+              </a:rPr>
+              <a:t>요약</a:t>
+            </a:r>
+            <a:r>
+              <a:rPr lang="ko-KR" altLang="en-US" sz="1600" dirty="0">
+                <a:latin typeface="Pretendard" pitchFamily="34" charset="0"/>
+                <a:ea typeface="Pretendard" pitchFamily="34" charset="-122"/>
+                <a:cs typeface="Pretendard" pitchFamily="34" charset="-120"/>
+              </a:rPr>
+              <a:t>하는 프롬프트 작성</a:t>
+            </a:r>
+            <a:endParaRPr lang="en-US" altLang="ko-KR" sz="1600" dirty="0">
+              <a:latin typeface="Pretendard" pitchFamily="34" charset="0"/>
+              <a:ea typeface="Pretendard" pitchFamily="34" charset="-122"/>
+              <a:cs typeface="Pretendard" pitchFamily="34" charset="-120"/>
+            </a:endParaRPr>
           </a:p>
           <a:p>
             <a:pPr marL="177800" indent="-177800" algn="l">
@@ -12547,20 +12677,13 @@
               <a:buChar char="•"/>
             </a:pPr>
             <a:r>
-              <a:rPr lang="en-US" sz="1600" dirty="0">
-                <a:solidFill>
-                  <a:srgbClr val="505060"/>
-                </a:solidFill>
-                <a:latin typeface="Pretendard" pitchFamily="34" charset="0"/>
-                <a:ea typeface="Pretendard" pitchFamily="34" charset="-122"/>
-                <a:cs typeface="Pretendard" pitchFamily="34" charset="-120"/>
-              </a:rPr>
-              <a:t>아카이브에서 '반도체' 논문 검색 → 제목·초록 요약</a:t>
-            </a:r>
-            <a:endParaRPr lang="en-US" sz="1600" dirty="0"/>
+              <a:rPr lang="ko-KR" altLang="en-US" sz="1600" dirty="0"/>
+              <a:t>프롬프트를 이용하여 논문요약 스킬 개발</a:t>
+            </a:r>
+            <a:endParaRPr lang="en-US" altLang="ko-KR" sz="1600" dirty="0"/>
           </a:p>
           <a:p>
-            <a:pPr marL="177800" indent="-177800" algn="l">
+            <a:pPr marL="177800" indent="-177800">
               <a:lnSpc>
                 <a:spcPct val="105000"/>
               </a:lnSpc>
@@ -12568,20 +12691,36 @@
                 <a:spcPts val="800"/>
               </a:spcAft>
               <a:buSzPct val="100000"/>
+              <a:buFontTx/>
               <a:buChar char="•"/>
             </a:pPr>
             <a:r>
-              <a:rPr lang="en-US" sz="1600" dirty="0">
-                <a:solidFill>
-                  <a:srgbClr val="505060"/>
-                </a:solidFill>
+              <a:rPr lang="ko-KR" altLang="en-US" sz="1600" dirty="0">
                 <a:latin typeface="Pretendard" pitchFamily="34" charset="0"/>
                 <a:ea typeface="Pretendard" pitchFamily="34" charset="-122"/>
                 <a:cs typeface="Pretendard" pitchFamily="34" charset="-120"/>
               </a:rPr>
-              <a:t>(beta·로그인은 사람)</a:t>
-            </a:r>
-            <a:endParaRPr lang="en-US" sz="1600" dirty="0"/>
+              <a:t>스킬은 작업 디렉토리 작성 후</a:t>
+            </a:r>
+            <a:r>
+              <a:rPr lang="en-US" altLang="ko-KR" sz="1600" dirty="0">
+                <a:latin typeface="Pretendard" pitchFamily="34" charset="0"/>
+                <a:ea typeface="Pretendard" pitchFamily="34" charset="-122"/>
+                <a:cs typeface="Pretendard" pitchFamily="34" charset="-120"/>
+                <a:sym typeface="Wingdings" panose="05000000000000000000" pitchFamily="2" charset="2"/>
+              </a:rPr>
+              <a:t> </a:t>
+            </a:r>
+            <a:r>
+              <a:rPr lang="ko-KR" altLang="en-US" sz="1600" dirty="0">
+                <a:latin typeface="Pretendard" pitchFamily="34" charset="0"/>
+                <a:ea typeface="Pretendard" pitchFamily="34" charset="-122"/>
+                <a:cs typeface="Pretendard" pitchFamily="34" charset="-120"/>
+                <a:sym typeface="Wingdings" panose="05000000000000000000" pitchFamily="2" charset="2"/>
+              </a:rPr>
+              <a:t>시스템 프롬프트 구성하여 수행</a:t>
+            </a:r>
+            <a:endParaRPr lang="en-US" altLang="ko-KR" sz="1600" dirty="0"/>
           </a:p>
         </p:txBody>
       </p:sp>
@@ -12594,7 +12733,7 @@
         <p:spPr>
           <a:xfrm>
             <a:off x="9729216" y="2103120"/>
-            <a:ext cx="4434840" cy="3017520"/>
+            <a:ext cx="4434840" cy="4011930"/>
           </a:xfrm>
           <a:prstGeom prst="roundRect">
             <a:avLst>
@@ -12681,7 +12820,40 @@
                 <a:ea typeface="Pretendard" pitchFamily="34" charset="-122"/>
                 <a:cs typeface="Pretendard" pitchFamily="34" charset="-120"/>
               </a:rPr>
-              <a:t>③ MCP 제작·연동 [직접]</a:t>
+              <a:t>③ </a:t>
+            </a:r>
+            <a:r>
+              <a:rPr lang="ko-KR" altLang="en-US" sz="1600" b="1" dirty="0">
+                <a:solidFill>
+                  <a:srgbClr val="FFFFFF"/>
+                </a:solidFill>
+                <a:latin typeface="Pretendard" pitchFamily="34" charset="0"/>
+                <a:ea typeface="Pretendard" pitchFamily="34" charset="-122"/>
+                <a:cs typeface="Pretendard" pitchFamily="34" charset="-120"/>
+              </a:rPr>
+              <a:t>이미지 생성 </a:t>
+            </a:r>
+            <a:r>
+              <a:rPr lang="en-US" sz="1600" b="1" dirty="0">
+                <a:solidFill>
+                  <a:srgbClr val="FFFFFF"/>
+                </a:solidFill>
+                <a:latin typeface="Pretendard" pitchFamily="34" charset="0"/>
+                <a:ea typeface="Pretendard" pitchFamily="34" charset="-122"/>
+                <a:cs typeface="Pretendard" pitchFamily="34" charset="-120"/>
+              </a:rPr>
+              <a:t>MCP</a:t>
+            </a:r>
+            <a:r>
+              <a:rPr lang="ko-KR" altLang="en-US" sz="1600" b="1" dirty="0">
+                <a:solidFill>
+                  <a:srgbClr val="FFFFFF"/>
+                </a:solidFill>
+                <a:latin typeface="Pretendard" pitchFamily="34" charset="0"/>
+                <a:ea typeface="Pretendard" pitchFamily="34" charset="-122"/>
+                <a:cs typeface="Pretendard" pitchFamily="34" charset="-120"/>
+              </a:rPr>
+              <a:t>를 정보조사 스킬에 통합</a:t>
             </a:r>
             <a:endParaRPr lang="en-US" sz="1600" dirty="0"/>
           </a:p>
@@ -12695,8 +12867,8 @@
         </p:nvSpPr>
         <p:spPr>
           <a:xfrm>
-            <a:off x="9930384" y="2724912"/>
-            <a:ext cx="4032504" cy="2286000"/>
+            <a:off x="9930384" y="2724911"/>
+            <a:ext cx="4032504" cy="3197257"/>
           </a:xfrm>
           <a:prstGeom prst="rect">
             <a:avLst/>
@@ -12720,16 +12892,81 @@
             </a:pPr>
             <a:r>
               <a:rPr lang="en-US" sz="1600" dirty="0">
-                <a:solidFill>
-                  <a:srgbClr val="505060"/>
-                </a:solidFill>
                 <a:latin typeface="Pretendard" pitchFamily="34" charset="0"/>
                 <a:ea typeface="Pretendard" pitchFamily="34" charset="-122"/>
                 <a:cs typeface="Pretendard" pitchFamily="34" charset="-120"/>
               </a:rPr>
-              <a:t>GPT Image 이미지 생성 MCP를 만들고</a:t>
-            </a:r>
-            <a:endParaRPr lang="en-US" sz="1600" dirty="0"/>
+              <a:t>3회차 </a:t>
+            </a:r>
+            <a:r>
+              <a:rPr lang="ko-KR" altLang="en-US" sz="1600" dirty="0">
+                <a:latin typeface="Pretendard" pitchFamily="34" charset="0"/>
+                <a:ea typeface="Pretendard" pitchFamily="34" charset="-122"/>
+                <a:cs typeface="Pretendard" pitchFamily="34" charset="-120"/>
+              </a:rPr>
+              <a:t>기업 </a:t>
+            </a:r>
+            <a:r>
+              <a:rPr lang="en-US" sz="1600" dirty="0" err="1">
+                <a:latin typeface="Pretendard" pitchFamily="34" charset="0"/>
+                <a:ea typeface="Pretendard" pitchFamily="34" charset="-122"/>
+                <a:cs typeface="Pretendard" pitchFamily="34" charset="-120"/>
+              </a:rPr>
+              <a:t>정보조사</a:t>
+            </a:r>
+            <a:r>
+              <a:rPr lang="en-US" sz="1600" dirty="0">
+                <a:latin typeface="Pretendard" pitchFamily="34" charset="0"/>
+                <a:ea typeface="Pretendard" pitchFamily="34" charset="-122"/>
+                <a:cs typeface="Pretendard" pitchFamily="34" charset="-120"/>
+              </a:rPr>
+              <a:t> </a:t>
+            </a:r>
+            <a:r>
+              <a:rPr lang="en-US" sz="1600" dirty="0" err="1">
+                <a:latin typeface="Pretendard" pitchFamily="34" charset="0"/>
+                <a:ea typeface="Pretendard" pitchFamily="34" charset="-122"/>
+                <a:cs typeface="Pretendard" pitchFamily="34" charset="-120"/>
+              </a:rPr>
+              <a:t>스킬에</a:t>
+            </a:r>
+            <a:r>
+              <a:rPr lang="en-US" sz="1600" dirty="0">
+                <a:latin typeface="Pretendard" pitchFamily="34" charset="0"/>
+                <a:ea typeface="Pretendard" pitchFamily="34" charset="-122"/>
+                <a:cs typeface="Pretendard" pitchFamily="34" charset="-120"/>
+              </a:rPr>
+              <a:t> PPT </a:t>
+            </a:r>
+            <a:r>
+              <a:rPr lang="ko-KR" altLang="en-US" sz="1600" dirty="0">
+                <a:latin typeface="Pretendard" pitchFamily="34" charset="0"/>
+                <a:ea typeface="Pretendard" pitchFamily="34" charset="-122"/>
+                <a:cs typeface="Pretendard" pitchFamily="34" charset="-120"/>
+              </a:rPr>
+              <a:t>생성 시 이미지 생성 </a:t>
+            </a:r>
+            <a:r>
+              <a:rPr lang="en-US" altLang="ko-KR" sz="1600" dirty="0">
+                <a:latin typeface="Pretendard" pitchFamily="34" charset="0"/>
+                <a:ea typeface="Pretendard" pitchFamily="34" charset="-122"/>
+                <a:cs typeface="Pretendard" pitchFamily="34" charset="-120"/>
+              </a:rPr>
+              <a:t>MCP</a:t>
+            </a:r>
+            <a:r>
+              <a:rPr lang="ko-KR" altLang="en-US" sz="1600" dirty="0">
+                <a:latin typeface="Pretendard" pitchFamily="34" charset="0"/>
+                <a:ea typeface="Pretendard" pitchFamily="34" charset="-122"/>
+                <a:cs typeface="Pretendard" pitchFamily="34" charset="-120"/>
+              </a:rPr>
+              <a:t>를 이용하여 필요한 이미지 생성하여 장표에 추가하도록 수정</a:t>
+            </a:r>
+            <a:endParaRPr lang="en-US" sz="1600" dirty="0">
+              <a:latin typeface="Pretendard" pitchFamily="34" charset="0"/>
+              <a:ea typeface="Pretendard" pitchFamily="34" charset="-122"/>
+              <a:cs typeface="Pretendard" pitchFamily="34" charset="-120"/>
+            </a:endParaRPr>
           </a:p>
           <a:p>
             <a:pPr marL="177800" indent="-177800" algn="l">
@@ -12743,88 +12980,114 @@
               <a:buChar char="•"/>
             </a:pPr>
             <a:r>
-              <a:rPr lang="en-US" sz="1600" dirty="0">
-                <a:solidFill>
-                  <a:srgbClr val="505060"/>
-                </a:solidFill>
-                <a:latin typeface="Pretendard" pitchFamily="34" charset="0"/>
-                <a:ea typeface="Pretendard" pitchFamily="34" charset="-122"/>
-                <a:cs typeface="Pretendard" pitchFamily="34" charset="-120"/>
-              </a:rPr>
-              <a:t>3회차 정보조사 스킬에 이미지 생성 기능 추가</a:t>
-            </a:r>
-            <a:endParaRPr lang="en-US" sz="1600" dirty="0"/>
+              <a:rPr lang="en-US" sz="1600" dirty="0"/>
+              <a:t>Claude</a:t>
+            </a:r>
+            <a:r>
+              <a:rPr lang="ko-KR" altLang="en-US" sz="1600" dirty="0"/>
+              <a:t> </a:t>
+            </a:r>
+            <a:r>
+              <a:rPr lang="en-US" altLang="ko-KR" sz="1600" dirty="0"/>
+              <a:t>Code</a:t>
+            </a:r>
+            <a:r>
+              <a:rPr lang="ko-KR" altLang="en-US" sz="1600" dirty="0"/>
+              <a:t>에서 작업 디렉토리를 정보조사 프로젝트로 변경하고 수행</a:t>
+            </a:r>
+            <a:endParaRPr lang="en-US" altLang="ko-KR" sz="1600" dirty="0"/>
           </a:p>
-        </p:txBody>
-      </p:sp>
-      <p:sp>
-        <p:nvSpPr>
-          <p:cNvPr id="17" name="Shape 15"/>
-          <p:cNvSpPr/>
-          <p:nvPr/>
-        </p:nvSpPr>
-        <p:spPr>
-          <a:xfrm>
-            <a:off x="457200" y="5349240"/>
-            <a:ext cx="13716000" cy="685800"/>
-          </a:xfrm>
-          <a:prstGeom prst="roundRect">
-            <a:avLst>
-              <a:gd name="adj" fmla="val 10667"/>
-            </a:avLst>
-          </a:prstGeom>
-          <a:solidFill>
-            <a:srgbClr val="CCFBF1"/>
-          </a:solidFill>
-          <a:ln/>
-        </p:spPr>
-        <p:txBody>
-          <a:bodyPr/>
-          <a:lstStyle/>
           <a:p>
-            <a:endParaRPr lang="ko-KR" altLang="en-US"/>
-          </a:p>
-        </p:txBody>
-      </p:sp>
-      <p:sp>
-        <p:nvSpPr>
-          <p:cNvPr id="18" name="Text 16"/>
-          <p:cNvSpPr/>
-          <p:nvPr/>
-        </p:nvSpPr>
-        <p:spPr>
-          <a:xfrm>
-            <a:off x="640080" y="5349240"/>
-            <a:ext cx="13350240" cy="685800"/>
-          </a:xfrm>
-          <a:prstGeom prst="rect">
-            <a:avLst/>
-          </a:prstGeom>
-          <a:noFill/>
-          <a:ln/>
-        </p:spPr>
-        <p:txBody>
-          <a:bodyPr wrap="square" rtlCol="0" anchor="ctr"/>
-          <a:lstStyle/>
-          <a:p>
-            <a:pPr marL="0" indent="0" algn="l">
+            <a:pPr algn="l">
               <a:lnSpc>
                 <a:spcPct val="105000"/>
               </a:lnSpc>
-              <a:buNone/>
+              <a:spcAft>
+                <a:spcPts val="800"/>
+              </a:spcAft>
+              <a:buSzPct val="100000"/>
             </a:pPr>
             <a:r>
-              <a:rPr lang="en-US" sz="1700" b="1" dirty="0">
-                <a:solidFill>
-                  <a:srgbClr val="2C2926"/>
-                </a:solidFill>
-                <a:latin typeface="Pretendard" pitchFamily="34" charset="0"/>
-                <a:ea typeface="Pretendard" pitchFamily="34" charset="-122"/>
-                <a:cs typeface="Pretendard" pitchFamily="34" charset="-120"/>
-              </a:rPr>
-              <a:t>오늘의 산출물: MCP 연동 Skill(③) + 웹 조회 Skill(①) — 둘 다 직접 만들어 완성.</a:t>
-            </a:r>
-            <a:endParaRPr lang="en-US" sz="1700" dirty="0"/>
+              <a:rPr lang="ko-KR" altLang="en-US" sz="1600" dirty="0" err="1"/>
+              <a:t>지침예시</a:t>
+            </a:r>
+            <a:r>
+              <a:rPr lang="en-US" altLang="ko-KR" sz="1600" dirty="0"/>
+              <a:t>:</a:t>
+            </a:r>
+          </a:p>
+          <a:p>
+            <a:r>
+              <a:rPr lang="ko-KR" altLang="ko-KR" sz="1400" dirty="0"/>
+              <a:t>- PPT 슬라이드의 내용 이해를 위한 이미지를 </a:t>
+            </a:r>
+            <a:r>
+              <a:rPr lang="ko-KR" altLang="ko-KR" sz="1400" dirty="0" err="1"/>
+              <a:t>gpt-image-mcp</a:t>
+            </a:r>
+            <a:r>
+              <a:rPr lang="ko-KR" altLang="ko-KR" sz="1400" dirty="0"/>
+              <a:t> </a:t>
+            </a:r>
+            <a:r>
+              <a:rPr lang="ko-KR" altLang="ko-KR" sz="1400" dirty="0" err="1"/>
+              <a:t>를</a:t>
+            </a:r>
+            <a:r>
+              <a:rPr lang="ko-KR" altLang="ko-KR" sz="1400" dirty="0"/>
+              <a:t> 이용하여 생성 </a:t>
+            </a:r>
+          </a:p>
+          <a:p>
+            <a:r>
+              <a:rPr lang="ko-KR" altLang="ko-KR" sz="1400" dirty="0"/>
+              <a:t>  - 장식적인 이미지는 지양 </a:t>
+            </a:r>
+          </a:p>
+          <a:p>
+            <a:r>
+              <a:rPr lang="ko-KR" altLang="ko-KR" sz="1400" dirty="0"/>
+              <a:t>  - 내용 이해를 돕는 </a:t>
+            </a:r>
+            <a:r>
+              <a:rPr lang="ko-KR" altLang="ko-KR" sz="1400" dirty="0" err="1"/>
+              <a:t>인포그래픽</a:t>
+            </a:r>
+            <a:r>
+              <a:rPr lang="ko-KR" altLang="ko-KR" sz="1400" dirty="0"/>
+              <a:t> 위주로 생성</a:t>
+            </a:r>
+          </a:p>
+          <a:p>
+            <a:r>
+              <a:rPr lang="ko-KR" altLang="ko-KR" sz="1400" dirty="0"/>
+              <a:t>  - 생성된 이미지는 PPT 슬라이드에 삽입하여 활용 </a:t>
+            </a:r>
+          </a:p>
+          <a:p>
+            <a:pPr algn="l">
+              <a:lnSpc>
+                <a:spcPct val="105000"/>
+              </a:lnSpc>
+              <a:spcAft>
+                <a:spcPts val="800"/>
+              </a:spcAft>
+              <a:buSzPct val="100000"/>
+            </a:pPr>
+            <a:endParaRPr lang="en-US" altLang="ko-KR" sz="1600" dirty="0"/>
+          </a:p>
+          <a:p>
+            <a:pPr marL="177800" indent="-177800" algn="l">
+              <a:lnSpc>
+                <a:spcPct val="105000"/>
+              </a:lnSpc>
+              <a:spcAft>
+                <a:spcPts val="800"/>
+              </a:spcAft>
+              <a:buSzPct val="100000"/>
+              <a:buChar char="•"/>
+            </a:pPr>
+            <a:endParaRPr lang="en-US" sz="1600" dirty="0"/>
           </a:p>
         </p:txBody>
       </p:sp>
@@ -12870,12 +13133,318 @@
             <a:pPr algn="r"/>
             <a:fld id="{F7021451-1387-4CA6-816F-3879F97B5CBC}" type="slidenum">
               <a:rPr lang="en-US" b="0"/>
-              <a:t>15</a:t>
+              <a:t>14</a:t>
             </a:fld>
             <a:endParaRPr lang="en-US"/>
           </a:p>
         </p:txBody>
       </p:sp>
+      <p:grpSp>
+        <p:nvGrpSpPr>
+          <p:cNvPr id="19" name="그룹 18">
+            <a:extLst>
+              <a:ext uri="{FF2B5EF4-FFF2-40B4-BE49-F238E27FC236}">
+                <a16:creationId xmlns:a16="http://schemas.microsoft.com/office/drawing/2014/main" id="{D1CAC921-9E7A-9EF1-C924-031A4062AD27}"/>
+              </a:ext>
+            </a:extLst>
+          </p:cNvPr>
+          <p:cNvGrpSpPr/>
+          <p:nvPr/>
+        </p:nvGrpSpPr>
+        <p:grpSpPr>
+          <a:xfrm>
+            <a:off x="457200" y="6423666"/>
+            <a:ext cx="4434840" cy="505770"/>
+            <a:chOff x="457200" y="5492123"/>
+            <a:chExt cx="5943600" cy="822960"/>
+          </a:xfrm>
+        </p:grpSpPr>
+        <p:sp>
+          <p:nvSpPr>
+            <p:cNvPr id="20" name="Shape 8">
+              <a:hlinkClick r:id="rId3"/>
+              <a:extLst>
+                <a:ext uri="{FF2B5EF4-FFF2-40B4-BE49-F238E27FC236}">
+                  <a16:creationId xmlns:a16="http://schemas.microsoft.com/office/drawing/2014/main" id="{C88FF081-D3C0-AFCD-A8B1-2055DF8BF79F}"/>
+                </a:ext>
+              </a:extLst>
+            </p:cNvPr>
+            <p:cNvSpPr/>
+            <p:nvPr/>
+          </p:nvSpPr>
+          <p:spPr>
+            <a:xfrm>
+              <a:off x="457200" y="5492123"/>
+              <a:ext cx="5943600" cy="822960"/>
+            </a:xfrm>
+            <a:prstGeom prst="roundRect">
+              <a:avLst>
+                <a:gd name="adj" fmla="val 6667"/>
+              </a:avLst>
+            </a:prstGeom>
+            <a:solidFill>
+              <a:srgbClr val="059669"/>
+            </a:solidFill>
+            <a:ln/>
+          </p:spPr>
+          <p:txBody>
+            <a:bodyPr/>
+            <a:lstStyle/>
+            <a:p>
+              <a:endParaRPr lang="ko-KR" altLang="en-US"/>
+            </a:p>
+          </p:txBody>
+        </p:sp>
+        <p:sp>
+          <p:nvSpPr>
+            <p:cNvPr id="21" name="Text 9">
+              <a:extLst>
+                <a:ext uri="{FF2B5EF4-FFF2-40B4-BE49-F238E27FC236}">
+                  <a16:creationId xmlns:a16="http://schemas.microsoft.com/office/drawing/2014/main" id="{7EDB3EB1-6491-69BE-294E-BAE3907B1A6E}"/>
+                </a:ext>
+              </a:extLst>
+            </p:cNvPr>
+            <p:cNvSpPr/>
+            <p:nvPr/>
+          </p:nvSpPr>
+          <p:spPr>
+            <a:xfrm>
+              <a:off x="457200" y="5492123"/>
+              <a:ext cx="5943600" cy="822960"/>
+            </a:xfrm>
+            <a:prstGeom prst="rect">
+              <a:avLst/>
+            </a:prstGeom>
+            <a:noFill/>
+            <a:ln/>
+          </p:spPr>
+          <p:txBody>
+            <a:bodyPr wrap="square" rtlCol="0" anchor="ctr"/>
+            <a:lstStyle/>
+            <a:p>
+              <a:pPr marL="0" indent="0" algn="ctr">
+                <a:buNone/>
+              </a:pPr>
+              <a:r>
+                <a:rPr lang="ko-KR" altLang="en-US" sz="1600" b="1" dirty="0">
+                  <a:solidFill>
+                    <a:srgbClr val="FFFFFF"/>
+                  </a:solidFill>
+                  <a:latin typeface="Pretendard" pitchFamily="34" charset="0"/>
+                  <a:ea typeface="Pretendard" pitchFamily="34" charset="-122"/>
+                  <a:cs typeface="Pretendard" pitchFamily="34" charset="-120"/>
+                </a:rPr>
+                <a:t>프롬프트 예시</a:t>
+              </a:r>
+              <a:endParaRPr lang="en-US" sz="1600" dirty="0"/>
+            </a:p>
+          </p:txBody>
+        </p:sp>
+      </p:grpSp>
+      <p:grpSp>
+        <p:nvGrpSpPr>
+          <p:cNvPr id="22" name="그룹 21">
+            <a:extLst>
+              <a:ext uri="{FF2B5EF4-FFF2-40B4-BE49-F238E27FC236}">
+                <a16:creationId xmlns:a16="http://schemas.microsoft.com/office/drawing/2014/main" id="{DAEDF64C-9D74-8A53-942E-E14587B99C14}"/>
+              </a:ext>
+            </a:extLst>
+          </p:cNvPr>
+          <p:cNvGrpSpPr/>
+          <p:nvPr/>
+        </p:nvGrpSpPr>
+        <p:grpSpPr>
+          <a:xfrm>
+            <a:off x="5120354" y="6423666"/>
+            <a:ext cx="4434840" cy="505770"/>
+            <a:chOff x="457200" y="5492123"/>
+            <a:chExt cx="5943600" cy="822960"/>
+          </a:xfrm>
+        </p:grpSpPr>
+        <p:sp>
+          <p:nvSpPr>
+            <p:cNvPr id="23" name="Shape 8">
+              <a:hlinkClick r:id="rId3"/>
+              <a:extLst>
+                <a:ext uri="{FF2B5EF4-FFF2-40B4-BE49-F238E27FC236}">
+                  <a16:creationId xmlns:a16="http://schemas.microsoft.com/office/drawing/2014/main" id="{6B56DA24-F510-5A78-76BA-50A76C9B5488}"/>
+                </a:ext>
+              </a:extLst>
+            </p:cNvPr>
+            <p:cNvSpPr/>
+            <p:nvPr/>
+          </p:nvSpPr>
+          <p:spPr>
+            <a:xfrm>
+              <a:off x="457200" y="5492123"/>
+              <a:ext cx="5943600" cy="822960"/>
+            </a:xfrm>
+            <a:prstGeom prst="roundRect">
+              <a:avLst>
+                <a:gd name="adj" fmla="val 6667"/>
+              </a:avLst>
+            </a:prstGeom>
+            <a:solidFill>
+              <a:srgbClr val="059669"/>
+            </a:solidFill>
+            <a:ln/>
+          </p:spPr>
+          <p:txBody>
+            <a:bodyPr/>
+            <a:lstStyle/>
+            <a:p>
+              <a:endParaRPr lang="ko-KR" altLang="en-US"/>
+            </a:p>
+          </p:txBody>
+        </p:sp>
+        <p:sp>
+          <p:nvSpPr>
+            <p:cNvPr id="24" name="Text 9">
+              <a:extLst>
+                <a:ext uri="{FF2B5EF4-FFF2-40B4-BE49-F238E27FC236}">
+                  <a16:creationId xmlns:a16="http://schemas.microsoft.com/office/drawing/2014/main" id="{CB88A281-0B8C-F1F2-55C6-144B5BBA5F56}"/>
+                </a:ext>
+              </a:extLst>
+            </p:cNvPr>
+            <p:cNvSpPr/>
+            <p:nvPr/>
+          </p:nvSpPr>
+          <p:spPr>
+            <a:xfrm>
+              <a:off x="457200" y="5492123"/>
+              <a:ext cx="5943600" cy="822960"/>
+            </a:xfrm>
+            <a:prstGeom prst="rect">
+              <a:avLst/>
+            </a:prstGeom>
+            <a:noFill/>
+            <a:ln/>
+          </p:spPr>
+          <p:txBody>
+            <a:bodyPr wrap="square" rtlCol="0" anchor="ctr"/>
+            <a:lstStyle/>
+            <a:p>
+              <a:pPr marL="0" indent="0" algn="ctr">
+                <a:buNone/>
+              </a:pPr>
+              <a:r>
+                <a:rPr lang="ko-KR" altLang="en-US" sz="1600" b="1" dirty="0">
+                  <a:solidFill>
+                    <a:srgbClr val="FFFFFF"/>
+                  </a:solidFill>
+                  <a:latin typeface="Pretendard" pitchFamily="34" charset="0"/>
+                  <a:ea typeface="Pretendard" pitchFamily="34" charset="-122"/>
+                  <a:cs typeface="Pretendard" pitchFamily="34" charset="-120"/>
+                </a:rPr>
+                <a:t>프롬프트 예시</a:t>
+              </a:r>
+              <a:endParaRPr lang="en-US" sz="1600" dirty="0"/>
+            </a:p>
+          </p:txBody>
+        </p:sp>
+      </p:grpSp>
+      <p:grpSp>
+        <p:nvGrpSpPr>
+          <p:cNvPr id="26" name="그룹 25">
+            <a:extLst>
+              <a:ext uri="{FF2B5EF4-FFF2-40B4-BE49-F238E27FC236}">
+                <a16:creationId xmlns:a16="http://schemas.microsoft.com/office/drawing/2014/main" id="{132F8B9C-70E3-C13D-95A2-44F5DE7C77D0}"/>
+              </a:ext>
+            </a:extLst>
+          </p:cNvPr>
+          <p:cNvGrpSpPr/>
+          <p:nvPr/>
+        </p:nvGrpSpPr>
+        <p:grpSpPr>
+          <a:xfrm>
+            <a:off x="9738360" y="6423666"/>
+            <a:ext cx="4434840" cy="505770"/>
+            <a:chOff x="457200" y="5492123"/>
+            <a:chExt cx="5943600" cy="822960"/>
+          </a:xfrm>
+        </p:grpSpPr>
+        <p:sp>
+          <p:nvSpPr>
+            <p:cNvPr id="27" name="Shape 8">
+              <a:hlinkClick r:id="rId3"/>
+              <a:extLst>
+                <a:ext uri="{FF2B5EF4-FFF2-40B4-BE49-F238E27FC236}">
+                  <a16:creationId xmlns:a16="http://schemas.microsoft.com/office/drawing/2014/main" id="{1F2A0980-9DD2-1EEA-7AD8-39AFEEB09533}"/>
+                </a:ext>
+              </a:extLst>
+            </p:cNvPr>
+            <p:cNvSpPr/>
+            <p:nvPr/>
+          </p:nvSpPr>
+          <p:spPr>
+            <a:xfrm>
+              <a:off x="457200" y="5492123"/>
+              <a:ext cx="5943600" cy="822960"/>
+            </a:xfrm>
+            <a:prstGeom prst="roundRect">
+              <a:avLst>
+                <a:gd name="adj" fmla="val 6667"/>
+              </a:avLst>
+            </a:prstGeom>
+            <a:solidFill>
+              <a:srgbClr val="059669"/>
+            </a:solidFill>
+            <a:ln/>
+          </p:spPr>
+          <p:txBody>
+            <a:bodyPr/>
+            <a:lstStyle/>
+            <a:p>
+              <a:endParaRPr lang="ko-KR" altLang="en-US"/>
+            </a:p>
+          </p:txBody>
+        </p:sp>
+        <p:sp>
+          <p:nvSpPr>
+            <p:cNvPr id="28" name="Text 9">
+              <a:extLst>
+                <a:ext uri="{FF2B5EF4-FFF2-40B4-BE49-F238E27FC236}">
+                  <a16:creationId xmlns:a16="http://schemas.microsoft.com/office/drawing/2014/main" id="{D1C57674-2737-4E95-A146-2C9FDF1F9877}"/>
+                </a:ext>
+              </a:extLst>
+            </p:cNvPr>
+            <p:cNvSpPr/>
+            <p:nvPr/>
+          </p:nvSpPr>
+          <p:spPr>
+            <a:xfrm>
+              <a:off x="457200" y="5492123"/>
+              <a:ext cx="5943600" cy="822960"/>
+            </a:xfrm>
+            <a:prstGeom prst="rect">
+              <a:avLst/>
+            </a:prstGeom>
+            <a:noFill/>
+            <a:ln/>
+          </p:spPr>
+          <p:txBody>
+            <a:bodyPr wrap="square" rtlCol="0" anchor="ctr"/>
+            <a:lstStyle/>
+            <a:p>
+              <a:pPr marL="0" indent="0" algn="ctr">
+                <a:buNone/>
+              </a:pPr>
+              <a:r>
+                <a:rPr lang="ko-KR" altLang="en-US" sz="1600" b="1" dirty="0">
+                  <a:solidFill>
+                    <a:srgbClr val="FFFFFF"/>
+                  </a:solidFill>
+                  <a:latin typeface="Pretendard" pitchFamily="34" charset="0"/>
+                  <a:ea typeface="Pretendard" pitchFamily="34" charset="-122"/>
+                  <a:cs typeface="Pretendard" pitchFamily="34" charset="-120"/>
+                </a:rPr>
+                <a:t>스킬 예시</a:t>
+              </a:r>
+              <a:endParaRPr lang="en-US" sz="1600" dirty="0"/>
+            </a:p>
+          </p:txBody>
+        </p:sp>
+      </p:grpSp>
     </p:spTree>
   </p:cSld>
   <p:clrMapOvr>
@@ -12884,7 +13453,7 @@
 </p:sld>
 </file>
 
-<file path=ppt/slides/slide16.xml><?xml version="1.0" encoding="utf-8"?>
+<file path=ppt/slides/slide15.xml><?xml version="1.0" encoding="utf-8"?>
 <p:sld xmlns:a="http://schemas.openxmlformats.org/drawingml/2006/main" xmlns:r="http://schemas.openxmlformats.org/officeDocument/2006/relationships" xmlns:p="http://schemas.openxmlformats.org/presentationml/2006/main">
   <p:cSld name="Slide 11">
     <p:spTree>
@@ -14321,7 +14890,7 @@
             <a:pPr algn="r"/>
             <a:fld id="{F7021451-1387-4CA6-816F-3879F97B5CBC}" type="slidenum">
               <a:rPr lang="en-US" b="0"/>
-              <a:t>16</a:t>
+              <a:t>15</a:t>
             </a:fld>
             <a:endParaRPr lang="en-US"/>
           </a:p>

--- a/decks/04-skill-advanced-mcp/4회차-Skill심화-웹MCP-MCP개발.pptx
+++ b/decks/04-skill-advanced-mcp/4회차-Skill심화-웹MCP-MCP개발.pptx
@@ -1934,7 +1934,7 @@
           </a:prstGeom>
           <a:extLst>
             <a:ext uri="{C572A759-6A51-4108-AA02-DFA0A04FC94B}">
-              <ma14:wrappingTextBoxFlag xmlns:ma14="http://schemas.microsoft.com/office/mac/drawingml/2011/main" xmlns="" val="0"/>
+              <ma14:wrappingTextBoxFlag xmlns="" xmlns:ma14="http://schemas.microsoft.com/office/mac/drawingml/2011/main" val="0"/>
             </a:ext>
           </a:extLst>
         </p:spPr>
@@ -2221,7 +2221,7 @@
           </a:prstGeom>
           <a:extLst>
             <a:ext uri="{C572A759-6A51-4108-AA02-DFA0A04FC94B}">
-              <ma14:wrappingTextBoxFlag xmlns:ma14="http://schemas.microsoft.com/office/mac/drawingml/2011/main" xmlns="" val="0"/>
+              <ma14:wrappingTextBoxFlag xmlns="" xmlns:ma14="http://schemas.microsoft.com/office/mac/drawingml/2011/main" val="0"/>
             </a:ext>
           </a:extLst>
         </p:spPr>
@@ -3288,7 +3288,7 @@
           </a:prstGeom>
           <a:extLst>
             <a:ext uri="{C572A759-6A51-4108-AA02-DFA0A04FC94B}">
-              <ma14:wrappingTextBoxFlag xmlns:ma14="http://schemas.microsoft.com/office/mac/drawingml/2011/main" xmlns="" val="0"/>
+              <ma14:wrappingTextBoxFlag xmlns="" xmlns:ma14="http://schemas.microsoft.com/office/mac/drawingml/2011/main" val="0"/>
             </a:ext>
           </a:extLst>
         </p:spPr>
@@ -11424,7 +11424,7 @@
           </a:prstGeom>
           <a:extLst>
             <a:ext uri="{C572A759-6A51-4108-AA02-DFA0A04FC94B}">
-              <ma14:wrappingTextBoxFlag xmlns:ma14="http://schemas.microsoft.com/office/mac/drawingml/2011/main" xmlns="" val="0"/>
+              <ma14:wrappingTextBoxFlag xmlns="" xmlns:ma14="http://schemas.microsoft.com/office/mac/drawingml/2011/main" val="0"/>
             </a:ext>
           </a:extLst>
         </p:spPr>
@@ -13111,7 +13111,7 @@
           </a:prstGeom>
           <a:extLst>
             <a:ext uri="{C572A759-6A51-4108-AA02-DFA0A04FC94B}">
-              <ma14:wrappingTextBoxFlag xmlns:ma14="http://schemas.microsoft.com/office/mac/drawingml/2011/main" xmlns="" val="0"/>
+              <ma14:wrappingTextBoxFlag xmlns="" xmlns:ma14="http://schemas.microsoft.com/office/mac/drawingml/2011/main" val="0"/>
             </a:ext>
           </a:extLst>
         </p:spPr>
@@ -13264,14 +13264,16 @@
         <p:sp>
           <p:nvSpPr>
             <p:cNvPr id="23" name="Shape 8">
-              <a:hlinkClick r:id="rId3"/>
+              <a:hlinkClick r:id="rId4"/>
               <a:extLst>
                 <a:ext uri="{FF2B5EF4-FFF2-40B4-BE49-F238E27FC236}">
                   <a16:creationId xmlns:a16="http://schemas.microsoft.com/office/drawing/2014/main" id="{6B56DA24-F510-5A78-76BA-50A76C9B5488}"/>
                 </a:ext>
               </a:extLst>
             </p:cNvPr>
-            <p:cNvSpPr/>
+            <p:cNvSpPr>
+              <a:spLocks/>
+            </p:cNvSpPr>
             <p:nvPr/>
           </p:nvSpPr>
           <p:spPr>
@@ -13366,7 +13368,7 @@
         <p:sp>
           <p:nvSpPr>
             <p:cNvPr id="27" name="Shape 8">
-              <a:hlinkClick r:id="rId3"/>
+              <a:hlinkClick r:id="rId5"/>
               <a:extLst>
                 <a:ext uri="{FF2B5EF4-FFF2-40B4-BE49-F238E27FC236}">
                   <a16:creationId xmlns:a16="http://schemas.microsoft.com/office/drawing/2014/main" id="{1F2A0980-9DD2-1EEA-7AD8-39AFEEB09533}"/>
@@ -14868,7 +14870,7 @@
           </a:prstGeom>
           <a:extLst>
             <a:ext uri="{C572A759-6A51-4108-AA02-DFA0A04FC94B}">
-              <ma14:wrappingTextBoxFlag xmlns:ma14="http://schemas.microsoft.com/office/mac/drawingml/2011/main" xmlns="" val="0"/>
+              <ma14:wrappingTextBoxFlag xmlns="" xmlns:ma14="http://schemas.microsoft.com/office/mac/drawingml/2011/main" val="0"/>
             </a:ext>
           </a:extLst>
         </p:spPr>
@@ -16976,7 +16978,7 @@
           </a:prstGeom>
           <a:extLst>
             <a:ext uri="{C572A759-6A51-4108-AA02-DFA0A04FC94B}">
-              <ma14:wrappingTextBoxFlag xmlns:ma14="http://schemas.microsoft.com/office/mac/drawingml/2011/main" xmlns="" val="0"/>
+              <ma14:wrappingTextBoxFlag xmlns="" xmlns:ma14="http://schemas.microsoft.com/office/mac/drawingml/2011/main" val="0"/>
             </a:ext>
           </a:extLst>
         </p:spPr>
@@ -17116,35 +17118,35 @@
           <p:nvPr>
             <p:extLst>
               <p:ext uri="{D42A27DB-BD31-4B8C-83A1-F6EECF244321}">
-                <p14:modId xmlns:p14="http://schemas.microsoft.com/office/powerpoint/2010/main" val="2641383778"/>
+                <p14:modId xmlns:p14="http://schemas.microsoft.com/office/powerpoint/2010/main" val="1769395206"/>
               </p:ext>
             </p:extLst>
           </p:nvPr>
         </p:nvGraphicFramePr>
         <p:xfrm>
           <a:off x="457200" y="1600200"/>
-          <a:ext cx="13716000" cy="2724912"/>
+          <a:ext cx="13716000" cy="2938371"/>
         </p:xfrm>
         <a:graphic>
           <a:graphicData uri="http://schemas.openxmlformats.org/drawingml/2006/table">
             <a:tbl>
               <a:tblPr/>
               <a:tblGrid>
-                <a:gridCol w="2743200">
+                <a:gridCol w="1985963">
                   <a:extLst>
                     <a:ext uri="{9D8B030D-6E8A-4147-A177-3AD203B41FA5}">
                       <a16:colId xmlns:a16="http://schemas.microsoft.com/office/drawing/2014/main" val="20000"/>
                     </a:ext>
                   </a:extLst>
                 </a:gridCol>
-                <a:gridCol w="5486400">
+                <a:gridCol w="5200650">
                   <a:extLst>
                     <a:ext uri="{9D8B030D-6E8A-4147-A177-3AD203B41FA5}">
                       <a16:colId xmlns:a16="http://schemas.microsoft.com/office/drawing/2014/main" val="20001"/>
                     </a:ext>
                   </a:extLst>
                 </a:gridCol>
-                <a:gridCol w="5486400">
+                <a:gridCol w="6529387">
                   <a:extLst>
                     <a:ext uri="{9D8B030D-6E8A-4147-A177-3AD203B41FA5}">
                       <a16:colId xmlns:a16="http://schemas.microsoft.com/office/drawing/2014/main" val="20002"/>
@@ -17152,7 +17154,7 @@
                   </a:extLst>
                 </a:gridCol>
               </a:tblGrid>
-              <a:tr h="457200">
+              <a:tr h="354935">
                 <a:tc>
                   <a:txBody>
                     <a:bodyPr/>
@@ -17363,7 +17365,7 @@
                   </a:ext>
                 </a:extLst>
               </a:tr>
-              <a:tr h="566928">
+              <a:tr h="440119">
                 <a:tc>
                   <a:txBody>
                     <a:bodyPr/>
@@ -17375,16 +17377,19 @@
                       <a:r>
                         <a:rPr lang="en-US" sz="1600" dirty="0">
                           <a:solidFill>
-                            <a:srgbClr val="505060"/>
+                            <a:schemeClr val="tx1"/>
                           </a:solidFill>
-                          <a:latin typeface="Pretendard" pitchFamily="34" charset="0"/>
+                          <a:latin typeface="+mn-lt"/>
                           <a:ea typeface="Pretendard" pitchFamily="34" charset="-122"/>
                           <a:cs typeface="Pretendard" pitchFamily="34" charset="-120"/>
                         </a:rPr>
                         <a:t>어떤 브라우저?</a:t>
                       </a:r>
                       <a:endParaRPr lang="en-US" sz="1600" dirty="0">
-                        <a:latin typeface="Pretendard" charset="0"/>
+                        <a:solidFill>
+                          <a:schemeClr val="tx1"/>
+                        </a:solidFill>
+                        <a:latin typeface="+mn-lt"/>
                         <a:ea typeface="Pretendard" charset="0"/>
                         <a:cs typeface="Pretendard" charset="0"/>
                       </a:endParaRPr>
@@ -17440,9 +17445,9 @@
                       <a:r>
                         <a:rPr lang="en-US" sz="1600" b="1" dirty="0" err="1">
                           <a:solidFill>
-                            <a:srgbClr val="505060"/>
+                            <a:schemeClr val="tx1"/>
                           </a:solidFill>
-                          <a:latin typeface="Pretendard" pitchFamily="34" charset="0"/>
+                          <a:latin typeface="+mn-lt"/>
                           <a:ea typeface="Pretendard" pitchFamily="34" charset="-122"/>
                           <a:cs typeface="Pretendard" pitchFamily="34" charset="-120"/>
                         </a:rPr>
@@ -17451,9 +17456,9 @@
                       <a:r>
                         <a:rPr lang="en-US" sz="1600" b="1" dirty="0">
                           <a:solidFill>
-                            <a:srgbClr val="505060"/>
+                            <a:schemeClr val="tx1"/>
                           </a:solidFill>
-                          <a:latin typeface="Pretendard" pitchFamily="34" charset="0"/>
+                          <a:latin typeface="+mn-lt"/>
                           <a:ea typeface="Pretendard" pitchFamily="34" charset="-122"/>
                           <a:cs typeface="Pretendard" pitchFamily="34" charset="-120"/>
                         </a:rPr>
@@ -17462,9 +17467,9 @@
                       <a:r>
                         <a:rPr lang="en-US" sz="1600" b="1" dirty="0" err="1">
                           <a:solidFill>
-                            <a:srgbClr val="505060"/>
+                            <a:schemeClr val="tx1"/>
                           </a:solidFill>
-                          <a:latin typeface="Pretendard" pitchFamily="34" charset="0"/>
+                          <a:latin typeface="+mn-lt"/>
                           <a:ea typeface="Pretendard" pitchFamily="34" charset="-122"/>
                           <a:cs typeface="Pretendard" pitchFamily="34" charset="-120"/>
                         </a:rPr>
@@ -17473,9 +17478,9 @@
                       <a:r>
                         <a:rPr lang="en-US" sz="1600" b="1" dirty="0">
                           <a:solidFill>
-                            <a:srgbClr val="505060"/>
+                            <a:schemeClr val="tx1"/>
                           </a:solidFill>
-                          <a:latin typeface="Pretendard" pitchFamily="34" charset="0"/>
+                          <a:latin typeface="+mn-lt"/>
                           <a:ea typeface="Pretendard" pitchFamily="34" charset="-122"/>
                           <a:cs typeface="Pretendard" pitchFamily="34" charset="-120"/>
                         </a:rPr>
@@ -17484,9 +17489,9 @@
                       <a:r>
                         <a:rPr lang="ko-KR" altLang="en-US" sz="1600" b="1" dirty="0">
                           <a:solidFill>
-                            <a:srgbClr val="505060"/>
+                            <a:schemeClr val="tx1"/>
                           </a:solidFill>
-                          <a:latin typeface="Pretendard" pitchFamily="34" charset="0"/>
+                          <a:latin typeface="+mn-lt"/>
                           <a:ea typeface="Pretendard" pitchFamily="34" charset="-122"/>
                           <a:cs typeface="Pretendard" pitchFamily="34" charset="-120"/>
                         </a:rPr>
@@ -17495,9 +17500,9 @@
                       <a:r>
                         <a:rPr lang="en-US" altLang="ko-KR" sz="1600" dirty="0">
                           <a:solidFill>
-                            <a:srgbClr val="505060"/>
+                            <a:schemeClr val="tx1"/>
                           </a:solidFill>
-                          <a:latin typeface="Pretendard" pitchFamily="34" charset="0"/>
+                          <a:latin typeface="+mn-lt"/>
                           <a:ea typeface="Pretendard" pitchFamily="34" charset="-122"/>
                           <a:cs typeface="Pretendard" pitchFamily="34" charset="-120"/>
                         </a:rPr>
@@ -17506,9 +17511,9 @@
                       <a:r>
                         <a:rPr lang="ko-KR" altLang="en-US" sz="1600" dirty="0">
                           <a:solidFill>
-                            <a:srgbClr val="505060"/>
+                            <a:schemeClr val="tx1"/>
                           </a:solidFill>
-                          <a:latin typeface="Pretendard" pitchFamily="34" charset="0"/>
+                          <a:latin typeface="+mn-lt"/>
                           <a:ea typeface="Pretendard" pitchFamily="34" charset="-122"/>
                           <a:cs typeface="Pretendard" pitchFamily="34" charset="-120"/>
                         </a:rPr>
@@ -17517,9 +17522,9 @@
                       <a:r>
                         <a:rPr lang="ko-KR" altLang="en-US" sz="1600" dirty="0" err="1">
                           <a:solidFill>
-                            <a:srgbClr val="505060"/>
+                            <a:schemeClr val="tx1"/>
                           </a:solidFill>
-                          <a:latin typeface="Pretendard" pitchFamily="34" charset="0"/>
+                          <a:latin typeface="+mn-lt"/>
                           <a:ea typeface="Pretendard" pitchFamily="34" charset="-122"/>
                           <a:cs typeface="Pretendard" pitchFamily="34" charset="-120"/>
                         </a:rPr>
@@ -17528,9 +17533,9 @@
                       <a:r>
                         <a:rPr lang="ko-KR" altLang="en-US" sz="1600" dirty="0">
                           <a:solidFill>
-                            <a:srgbClr val="505060"/>
+                            <a:schemeClr val="tx1"/>
                           </a:solidFill>
-                          <a:latin typeface="Pretendard" pitchFamily="34" charset="0"/>
+                          <a:latin typeface="+mn-lt"/>
                           <a:ea typeface="Pretendard" pitchFamily="34" charset="-122"/>
                           <a:cs typeface="Pretendard" pitchFamily="34" charset="-120"/>
                         </a:rPr>
@@ -17539,16 +17544,19 @@
                       <a:r>
                         <a:rPr lang="en-US" altLang="ko-KR" sz="1600" dirty="0">
                           <a:solidFill>
-                            <a:srgbClr val="505060"/>
+                            <a:schemeClr val="tx1"/>
                           </a:solidFill>
-                          <a:latin typeface="Pretendard" pitchFamily="34" charset="0"/>
+                          <a:latin typeface="+mn-lt"/>
                           <a:ea typeface="Pretendard" pitchFamily="34" charset="-122"/>
                           <a:cs typeface="Pretendard" pitchFamily="34" charset="-120"/>
                         </a:rPr>
                         <a:t>)</a:t>
                       </a:r>
                       <a:endParaRPr lang="en-US" sz="1600" dirty="0">
-                        <a:latin typeface="Pretendard" charset="0"/>
+                        <a:solidFill>
+                          <a:schemeClr val="tx1"/>
+                        </a:solidFill>
+                        <a:latin typeface="+mn-lt"/>
                         <a:ea typeface="Pretendard" charset="0"/>
                         <a:cs typeface="Pretendard" charset="0"/>
                       </a:endParaRPr>
@@ -17604,9 +17612,9 @@
                       <a:r>
                         <a:rPr lang="ko-KR" altLang="en-US" sz="1600" b="1" dirty="0">
                           <a:solidFill>
-                            <a:srgbClr val="505060"/>
+                            <a:schemeClr val="tx1"/>
                           </a:solidFill>
-                          <a:latin typeface="Pretendard" pitchFamily="34" charset="0"/>
+                          <a:latin typeface="+mn-lt"/>
                           <a:ea typeface="Pretendard" pitchFamily="34" charset="-122"/>
                           <a:cs typeface="Pretendard" pitchFamily="34" charset="-120"/>
                         </a:rPr>
@@ -17615,16 +17623,19 @@
                       <a:r>
                         <a:rPr lang="ko-KR" altLang="en-US" sz="1600" dirty="0">
                           <a:solidFill>
-                            <a:srgbClr val="505060"/>
+                            <a:schemeClr val="tx1"/>
                           </a:solidFill>
-                          <a:latin typeface="Pretendard" pitchFamily="34" charset="0"/>
+                          <a:latin typeface="+mn-lt"/>
                           <a:ea typeface="Pretendard" pitchFamily="34" charset="-122"/>
                           <a:cs typeface="Pretendard" pitchFamily="34" charset="-120"/>
                         </a:rPr>
                         <a:t>으로 수행</a:t>
                       </a:r>
                       <a:endParaRPr lang="en-US" sz="1600" dirty="0">
-                        <a:latin typeface="Pretendard" charset="0"/>
+                        <a:solidFill>
+                          <a:schemeClr val="tx1"/>
+                        </a:solidFill>
+                        <a:latin typeface="+mn-lt"/>
                         <a:ea typeface="Pretendard" charset="0"/>
                         <a:cs typeface="Pretendard" charset="0"/>
                       </a:endParaRPr>
@@ -17675,7 +17686,7 @@
                   </a:ext>
                 </a:extLst>
               </a:tr>
-              <a:tr h="566928">
+              <a:tr h="440119">
                 <a:tc>
                   <a:txBody>
                     <a:bodyPr/>
@@ -17687,16 +17698,19 @@
                       <a:r>
                         <a:rPr lang="en-US" sz="1600" dirty="0">
                           <a:solidFill>
-                            <a:srgbClr val="505060"/>
+                            <a:schemeClr val="tx1"/>
                           </a:solidFill>
-                          <a:latin typeface="Pretendard" pitchFamily="34" charset="0"/>
+                          <a:latin typeface="+mn-lt"/>
                           <a:ea typeface="Pretendard" pitchFamily="34" charset="-122"/>
                           <a:cs typeface="Pretendard" pitchFamily="34" charset="-120"/>
                         </a:rPr>
                         <a:t>내 로그인 상태</a:t>
                       </a:r>
                       <a:endParaRPr lang="en-US" sz="1600" dirty="0">
-                        <a:latin typeface="Pretendard" charset="0"/>
+                        <a:solidFill>
+                          <a:schemeClr val="tx1"/>
+                        </a:solidFill>
+                        <a:latin typeface="+mn-lt"/>
                         <a:ea typeface="Pretendard" charset="0"/>
                         <a:cs typeface="Pretendard" charset="0"/>
                       </a:endParaRPr>
@@ -17752,16 +17766,19 @@
                       <a:r>
                         <a:rPr lang="en-US" sz="1600" dirty="0">
                           <a:solidFill>
-                            <a:srgbClr val="505060"/>
+                            <a:schemeClr val="tx1"/>
                           </a:solidFill>
-                          <a:latin typeface="Pretendard" pitchFamily="34" charset="0"/>
+                          <a:latin typeface="+mn-lt"/>
                           <a:ea typeface="Pretendard" pitchFamily="34" charset="-122"/>
                           <a:cs typeface="Pretendard" pitchFamily="34" charset="-120"/>
                         </a:rPr>
                         <a:t>분리(깨끗) — 내 세션과 별개</a:t>
                       </a:r>
                       <a:endParaRPr lang="en-US" sz="1600" dirty="0">
-                        <a:latin typeface="Pretendard" charset="0"/>
+                        <a:solidFill>
+                          <a:schemeClr val="tx1"/>
+                        </a:solidFill>
+                        <a:latin typeface="+mn-lt"/>
                         <a:ea typeface="Pretendard" charset="0"/>
                         <a:cs typeface="Pretendard" charset="0"/>
                       </a:endParaRPr>
@@ -17817,9 +17834,9 @@
                       <a:r>
                         <a:rPr lang="en-US" sz="1600" dirty="0">
                           <a:solidFill>
-                            <a:srgbClr val="505060"/>
+                            <a:schemeClr val="tx1"/>
                           </a:solidFill>
-                          <a:latin typeface="Pretendard" pitchFamily="34" charset="0"/>
+                          <a:latin typeface="+mn-lt"/>
                           <a:ea typeface="Pretendard" pitchFamily="34" charset="-122"/>
                           <a:cs typeface="Pretendard" pitchFamily="34" charset="-120"/>
                         </a:rPr>
@@ -17828,16 +17845,19 @@
                       <a:r>
                         <a:rPr lang="en-US" sz="1600" b="1" dirty="0">
                           <a:solidFill>
-                            <a:srgbClr val="505060"/>
+                            <a:schemeClr val="tx1"/>
                           </a:solidFill>
-                          <a:latin typeface="Pretendard" pitchFamily="34" charset="0"/>
+                          <a:latin typeface="+mn-lt"/>
                           <a:ea typeface="Pretendard" pitchFamily="34" charset="-122"/>
                           <a:cs typeface="Pretendard" pitchFamily="34" charset="-120"/>
                         </a:rPr>
                         <a:t>이미 로그인한 사이트 접근</a:t>
                       </a:r>
                       <a:endParaRPr lang="en-US" sz="1600" b="1" dirty="0">
-                        <a:latin typeface="Pretendard" charset="0"/>
+                        <a:solidFill>
+                          <a:schemeClr val="tx1"/>
+                        </a:solidFill>
+                        <a:latin typeface="+mn-lt"/>
                         <a:ea typeface="Pretendard" charset="0"/>
                         <a:cs typeface="Pretendard" charset="0"/>
                       </a:endParaRPr>
@@ -17888,7 +17908,7 @@
                   </a:ext>
                 </a:extLst>
               </a:tr>
-              <a:tr h="566928">
+              <a:tr h="440119">
                 <a:tc>
                   <a:txBody>
                     <a:bodyPr/>
@@ -17900,16 +17920,19 @@
                       <a:r>
                         <a:rPr lang="en-US" sz="1600" dirty="0">
                           <a:solidFill>
-                            <a:srgbClr val="505060"/>
+                            <a:schemeClr val="tx1"/>
                           </a:solidFill>
-                          <a:latin typeface="Pretendard" pitchFamily="34" charset="0"/>
+                          <a:latin typeface="+mn-lt"/>
                           <a:ea typeface="Pretendard" pitchFamily="34" charset="-122"/>
                           <a:cs typeface="Pretendard" pitchFamily="34" charset="-120"/>
                         </a:rPr>
                         <a:t>잘 맞는 일</a:t>
                       </a:r>
                       <a:endParaRPr lang="en-US" sz="1600" dirty="0">
-                        <a:latin typeface="Pretendard" charset="0"/>
+                        <a:solidFill>
+                          <a:schemeClr val="tx1"/>
+                        </a:solidFill>
+                        <a:latin typeface="+mn-lt"/>
                         <a:ea typeface="Pretendard" charset="0"/>
                         <a:cs typeface="Pretendard" charset="0"/>
                       </a:endParaRPr>
@@ -17965,16 +17988,19 @@
                       <a:r>
                         <a:rPr lang="en-US" sz="1600" dirty="0">
                           <a:solidFill>
-                            <a:srgbClr val="505060"/>
+                            <a:schemeClr val="tx1"/>
                           </a:solidFill>
-                          <a:latin typeface="Pretendard" pitchFamily="34" charset="0"/>
+                          <a:latin typeface="+mn-lt"/>
                           <a:ea typeface="Pretendard" pitchFamily="34" charset="-122"/>
                           <a:cs typeface="Pretendard" pitchFamily="34" charset="-120"/>
                         </a:rPr>
                         <a:t>공개 웹 정보 조회·정리</a:t>
                       </a:r>
                       <a:endParaRPr lang="en-US" sz="1600" dirty="0">
-                        <a:latin typeface="Pretendard" charset="0"/>
+                        <a:solidFill>
+                          <a:schemeClr val="tx1"/>
+                        </a:solidFill>
+                        <a:latin typeface="+mn-lt"/>
                         <a:ea typeface="Pretendard" charset="0"/>
                         <a:cs typeface="Pretendard" charset="0"/>
                       </a:endParaRPr>
@@ -18030,16 +18056,19 @@
                       <a:r>
                         <a:rPr lang="en-US" sz="1600" dirty="0">
                           <a:solidFill>
-                            <a:srgbClr val="505060"/>
+                            <a:schemeClr val="tx1"/>
                           </a:solidFill>
-                          <a:latin typeface="Pretendard" pitchFamily="34" charset="0"/>
+                          <a:latin typeface="+mn-lt"/>
                           <a:ea typeface="Pretendard" pitchFamily="34" charset="-122"/>
                           <a:cs typeface="Pretendard" pitchFamily="34" charset="-120"/>
                         </a:rPr>
                         <a:t>로그인이 필요한 내 계정 작업</a:t>
                       </a:r>
                       <a:endParaRPr lang="en-US" sz="1600" dirty="0">
-                        <a:latin typeface="Pretendard" charset="0"/>
+                        <a:solidFill>
+                          <a:schemeClr val="tx1"/>
+                        </a:solidFill>
+                        <a:latin typeface="+mn-lt"/>
                         <a:ea typeface="Pretendard" charset="0"/>
                         <a:cs typeface="Pretendard" charset="0"/>
                       </a:endParaRPr>
@@ -18090,7 +18119,7 @@
                   </a:ext>
                 </a:extLst>
               </a:tr>
-              <a:tr h="566928">
+              <a:tr h="440119">
                 <a:tc>
                   <a:txBody>
                     <a:bodyPr/>
@@ -18102,16 +18131,19 @@
                       <a:r>
                         <a:rPr lang="ko-KR" altLang="en-US" sz="1600" dirty="0">
                           <a:solidFill>
-                            <a:srgbClr val="505060"/>
+                            <a:schemeClr val="tx1"/>
                           </a:solidFill>
-                          <a:latin typeface="Pretendard" pitchFamily="34" charset="0"/>
+                          <a:latin typeface="+mn-lt"/>
                           <a:ea typeface="Pretendard" pitchFamily="34" charset="-122"/>
                           <a:cs typeface="Pretendard" pitchFamily="34" charset="-120"/>
                         </a:rPr>
                         <a:t>설치</a:t>
                       </a:r>
                       <a:endParaRPr lang="en-US" sz="1600" dirty="0">
-                        <a:latin typeface="Pretendard" charset="0"/>
+                        <a:solidFill>
+                          <a:schemeClr val="tx1"/>
+                        </a:solidFill>
+                        <a:latin typeface="+mn-lt"/>
                         <a:ea typeface="Pretendard" charset="0"/>
                         <a:cs typeface="Pretendard" charset="0"/>
                       </a:endParaRPr>
@@ -18167,9 +18199,9 @@
                       <a:r>
                         <a:rPr lang="en-US" sz="1600" dirty="0">
                           <a:solidFill>
-                            <a:srgbClr val="505060"/>
+                            <a:schemeClr val="tx1"/>
                           </a:solidFill>
-                          <a:latin typeface="Pretendard" pitchFamily="34" charset="0"/>
+                          <a:latin typeface="+mn-lt"/>
                           <a:ea typeface="Pretendard" pitchFamily="34" charset="-122"/>
                           <a:cs typeface="Pretendard" pitchFamily="34" charset="-120"/>
                         </a:rPr>
@@ -18178,16 +18210,19 @@
                       <a:r>
                         <a:rPr lang="ko-KR" altLang="en-US" sz="1600" dirty="0">
                           <a:solidFill>
-                            <a:srgbClr val="505060"/>
+                            <a:schemeClr val="tx1"/>
                           </a:solidFill>
-                          <a:latin typeface="Pretendard" pitchFamily="34" charset="0"/>
+                          <a:latin typeface="+mn-lt"/>
                           <a:ea typeface="Pretendard" pitchFamily="34" charset="-122"/>
                           <a:cs typeface="Pretendard" pitchFamily="34" charset="-120"/>
                         </a:rPr>
                         <a:t>설치 필요</a:t>
                       </a:r>
                       <a:endParaRPr lang="en-US" sz="1600" dirty="0">
-                        <a:latin typeface="Pretendard" charset="0"/>
+                        <a:solidFill>
+                          <a:schemeClr val="tx1"/>
+                        </a:solidFill>
+                        <a:latin typeface="+mn-lt"/>
                         <a:ea typeface="Pretendard" charset="0"/>
                         <a:cs typeface="Pretendard" charset="0"/>
                       </a:endParaRPr>
@@ -18243,16 +18278,19 @@
                       <a:r>
                         <a:rPr lang="ko-KR" altLang="en-US" sz="1600" dirty="0">
                           <a:solidFill>
-                            <a:srgbClr val="505060"/>
+                            <a:schemeClr val="tx1"/>
                           </a:solidFill>
-                          <a:latin typeface="Pretendard" pitchFamily="34" charset="0"/>
+                          <a:latin typeface="+mn-lt"/>
                           <a:ea typeface="Pretendard" pitchFamily="34" charset="-122"/>
                           <a:cs typeface="Pretendard" pitchFamily="34" charset="-120"/>
                         </a:rPr>
                         <a:t>설정에서 활성화 필요</a:t>
                       </a:r>
                       <a:endParaRPr lang="en-US" sz="1600" dirty="0">
-                        <a:latin typeface="Pretendard" charset="0"/>
+                        <a:solidFill>
+                          <a:schemeClr val="tx1"/>
+                        </a:solidFill>
+                        <a:latin typeface="+mn-lt"/>
                         <a:ea typeface="Pretendard" charset="0"/>
                         <a:cs typeface="Pretendard" charset="0"/>
                       </a:endParaRPr>
@@ -18300,6 +18338,391 @@
                 <a:extLst>
                   <a:ext uri="{0D108BD9-81ED-4DB2-BD59-A6C34878D82A}">
                     <a16:rowId xmlns:a16="http://schemas.microsoft.com/office/drawing/2014/main" val="10004"/>
+                  </a:ext>
+                </a:extLst>
+              </a:tr>
+              <a:tr h="499201">
+                <a:tc>
+                  <a:txBody>
+                    <a:bodyPr/>
+                    <a:lstStyle/>
+                    <a:p>
+                      <a:pPr marL="0" indent="0" algn="l">
+                        <a:buNone/>
+                      </a:pPr>
+                      <a:r>
+                        <a:rPr lang="ko-KR" altLang="en-US" sz="1600" dirty="0">
+                          <a:solidFill>
+                            <a:schemeClr val="tx1"/>
+                          </a:solidFill>
+                          <a:latin typeface="+mn-lt"/>
+                          <a:ea typeface="Pretendard" charset="0"/>
+                          <a:cs typeface="Pretendard" charset="0"/>
+                        </a:rPr>
+                        <a:t>보안 설정</a:t>
+                      </a:r>
+                      <a:endParaRPr lang="en-US" sz="1600" dirty="0">
+                        <a:solidFill>
+                          <a:schemeClr val="tx1"/>
+                        </a:solidFill>
+                        <a:latin typeface="+mn-lt"/>
+                        <a:ea typeface="Pretendard" charset="0"/>
+                        <a:cs typeface="Pretendard" charset="0"/>
+                      </a:endParaRPr>
+                    </a:p>
+                  </a:txBody>
+                  <a:tcPr anchor="ctr">
+                    <a:lnL w="12700" cap="flat" cmpd="sng" algn="ctr">
+                      <a:solidFill>
+                        <a:srgbClr val="DDDDE0"/>
+                      </a:solidFill>
+                      <a:prstDash val="solid"/>
+                      <a:round/>
+                      <a:headEnd type="none" w="med" len="med"/>
+                      <a:tailEnd type="none" w="med" len="med"/>
+                    </a:lnL>
+                    <a:lnR w="12700" cap="flat" cmpd="sng" algn="ctr">
+                      <a:solidFill>
+                        <a:srgbClr val="DDDDE0"/>
+                      </a:solidFill>
+                      <a:prstDash val="solid"/>
+                      <a:round/>
+                      <a:headEnd type="none" w="med" len="med"/>
+                      <a:tailEnd type="none" w="med" len="med"/>
+                    </a:lnR>
+                    <a:lnT w="12700" cap="flat" cmpd="sng" algn="ctr">
+                      <a:solidFill>
+                        <a:srgbClr val="DDDDE0"/>
+                      </a:solidFill>
+                      <a:prstDash val="solid"/>
+                      <a:round/>
+                      <a:headEnd type="none" w="med" len="med"/>
+                      <a:tailEnd type="none" w="med" len="med"/>
+                    </a:lnT>
+                    <a:lnB w="12700" cap="flat" cmpd="sng" algn="ctr">
+                      <a:solidFill>
+                        <a:srgbClr val="DDDDE0"/>
+                      </a:solidFill>
+                      <a:prstDash val="solid"/>
+                      <a:round/>
+                      <a:headEnd type="none" w="med" len="med"/>
+                      <a:tailEnd type="none" w="med" len="med"/>
+                    </a:lnB>
+                  </a:tcPr>
+                </a:tc>
+                <a:tc>
+                  <a:txBody>
+                    <a:bodyPr/>
+                    <a:lstStyle/>
+                    <a:p>
+                      <a:pPr marL="0" indent="0" algn="l">
+                        <a:buNone/>
+                      </a:pPr>
+                      <a:r>
+                        <a:rPr lang="en-US" sz="1600" dirty="0">
+                          <a:solidFill>
+                            <a:schemeClr val="tx1"/>
+                          </a:solidFill>
+                          <a:latin typeface="+mn-lt"/>
+                          <a:ea typeface="Pretendard" charset="0"/>
+                          <a:cs typeface="Pretendard" charset="0"/>
+                        </a:rPr>
+                        <a:t>MCP </a:t>
+                      </a:r>
+                      <a:r>
+                        <a:rPr lang="ko-KR" altLang="en-US" sz="1600" dirty="0">
+                          <a:solidFill>
+                            <a:schemeClr val="tx1"/>
+                          </a:solidFill>
+                          <a:latin typeface="+mn-lt"/>
+                          <a:ea typeface="Pretendard" charset="0"/>
+                          <a:cs typeface="Pretendard" charset="0"/>
+                        </a:rPr>
+                        <a:t>자체에 특별한 보안 설정 없음</a:t>
+                      </a:r>
+                      <a:endParaRPr lang="en-US" sz="1600" dirty="0">
+                        <a:solidFill>
+                          <a:schemeClr val="tx1"/>
+                        </a:solidFill>
+                        <a:latin typeface="+mn-lt"/>
+                        <a:ea typeface="Pretendard" charset="0"/>
+                        <a:cs typeface="Pretendard" charset="0"/>
+                      </a:endParaRPr>
+                    </a:p>
+                  </a:txBody>
+                  <a:tcPr anchor="ctr">
+                    <a:lnL w="12700" cap="flat" cmpd="sng" algn="ctr">
+                      <a:solidFill>
+                        <a:srgbClr val="DDDDE0"/>
+                      </a:solidFill>
+                      <a:prstDash val="solid"/>
+                      <a:round/>
+                      <a:headEnd type="none" w="med" len="med"/>
+                      <a:tailEnd type="none" w="med" len="med"/>
+                    </a:lnL>
+                    <a:lnR w="12700" cap="flat" cmpd="sng" algn="ctr">
+                      <a:solidFill>
+                        <a:srgbClr val="DDDDE0"/>
+                      </a:solidFill>
+                      <a:prstDash val="solid"/>
+                      <a:round/>
+                      <a:headEnd type="none" w="med" len="med"/>
+                      <a:tailEnd type="none" w="med" len="med"/>
+                    </a:lnR>
+                    <a:lnT w="12700" cap="flat" cmpd="sng" algn="ctr">
+                      <a:solidFill>
+                        <a:srgbClr val="DDDDE0"/>
+                      </a:solidFill>
+                      <a:prstDash val="solid"/>
+                      <a:round/>
+                      <a:headEnd type="none" w="med" len="med"/>
+                      <a:tailEnd type="none" w="med" len="med"/>
+                    </a:lnT>
+                    <a:lnB w="12700" cap="flat" cmpd="sng" algn="ctr">
+                      <a:solidFill>
+                        <a:srgbClr val="DDDDE0"/>
+                      </a:solidFill>
+                      <a:prstDash val="solid"/>
+                      <a:round/>
+                      <a:headEnd type="none" w="med" len="med"/>
+                      <a:tailEnd type="none" w="med" len="med"/>
+                    </a:lnB>
+                  </a:tcPr>
+                </a:tc>
+                <a:tc>
+                  <a:txBody>
+                    <a:bodyPr/>
+                    <a:lstStyle/>
+                    <a:p>
+                      <a:pPr marL="285750" indent="-285750" algn="l">
+                        <a:buFont typeface="Arial" panose="020B0604020202020204" pitchFamily="34" charset="0"/>
+                        <a:buChar char="•"/>
+                      </a:pPr>
+                      <a:r>
+                        <a:rPr lang="en-US" altLang="ko-KR" sz="1600" b="0" i="0" dirty="0">
+                          <a:solidFill>
+                            <a:schemeClr val="tx1"/>
+                          </a:solidFill>
+                          <a:effectLst/>
+                          <a:latin typeface="+mn-lt"/>
+                        </a:rPr>
+                        <a:t>Claude Code </a:t>
+                      </a:r>
+                      <a:r>
+                        <a:rPr lang="ko-KR" altLang="en-US" sz="1600" b="0" i="0" dirty="0">
+                          <a:solidFill>
+                            <a:schemeClr val="tx1"/>
+                          </a:solidFill>
+                          <a:effectLst/>
+                          <a:latin typeface="+mn-lt"/>
+                        </a:rPr>
+                        <a:t>설정 </a:t>
+                      </a:r>
+                      <a:r>
+                        <a:rPr lang="en-US" altLang="ko-KR" sz="1600" b="0" i="0" dirty="0">
+                          <a:solidFill>
+                            <a:schemeClr val="tx1"/>
+                          </a:solidFill>
+                          <a:effectLst/>
+                          <a:latin typeface="+mn-lt"/>
+                        </a:rPr>
+                        <a:t>&gt; Chrome</a:t>
+                      </a:r>
+                      <a:r>
+                        <a:rPr lang="ko-KR" altLang="en-US" sz="1600" b="0" i="0" dirty="0">
+                          <a:solidFill>
+                            <a:schemeClr val="tx1"/>
+                          </a:solidFill>
+                          <a:effectLst/>
+                          <a:latin typeface="+mn-lt"/>
+                        </a:rPr>
+                        <a:t>용 </a:t>
+                      </a:r>
+                      <a:r>
+                        <a:rPr lang="en-US" altLang="ko-KR" sz="1600" b="0" i="0" dirty="0">
+                          <a:solidFill>
+                            <a:schemeClr val="tx1"/>
+                          </a:solidFill>
+                          <a:effectLst/>
+                          <a:latin typeface="+mn-lt"/>
+                        </a:rPr>
+                        <a:t>Claude </a:t>
+                      </a:r>
+                      <a:r>
+                        <a:rPr lang="ko-KR" altLang="en-US" sz="1600" b="0" i="0" dirty="0">
+                          <a:solidFill>
+                            <a:schemeClr val="tx1"/>
+                          </a:solidFill>
+                          <a:effectLst/>
+                          <a:latin typeface="+mn-lt"/>
+                        </a:rPr>
+                        <a:t>메뉴에서 차단 도메인 지정 </a:t>
+                      </a:r>
+                      <a:endParaRPr lang="en-US" altLang="ko-KR" sz="1600" b="0" i="0" dirty="0">
+                        <a:solidFill>
+                          <a:schemeClr val="tx1"/>
+                        </a:solidFill>
+                        <a:effectLst/>
+                        <a:latin typeface="+mn-lt"/>
+                      </a:endParaRPr>
+                    </a:p>
+                    <a:p>
+                      <a:pPr marL="285750" indent="-285750" algn="l">
+                        <a:buFont typeface="Arial" panose="020B0604020202020204" pitchFamily="34" charset="0"/>
+                        <a:buChar char="•"/>
+                      </a:pPr>
+                      <a:r>
+                        <a:rPr lang="ko-KR" altLang="ko-KR" sz="1600" b="0" i="0" dirty="0">
+                          <a:solidFill>
+                            <a:schemeClr val="tx1"/>
+                          </a:solidFill>
+                          <a:effectLst/>
+                          <a:latin typeface="+mn-lt"/>
+                        </a:rPr>
+                        <a:t>특정 유형의 도메인(</a:t>
+                      </a:r>
+                      <a:r>
+                        <a:rPr lang="ko-KR" altLang="ko-KR" sz="1600" b="0" i="0" dirty="0" err="1">
+                          <a:solidFill>
+                            <a:schemeClr val="tx1"/>
+                          </a:solidFill>
+                          <a:effectLst/>
+                          <a:latin typeface="+mn-lt"/>
+                        </a:rPr>
+                        <a:t>로그인·개발자</a:t>
+                      </a:r>
+                      <a:r>
+                        <a:rPr lang="ko-KR" altLang="ko-KR" sz="1600" b="0" i="0" dirty="0">
+                          <a:solidFill>
+                            <a:schemeClr val="tx1"/>
+                          </a:solidFill>
+                          <a:effectLst/>
+                          <a:latin typeface="+mn-lt"/>
+                        </a:rPr>
+                        <a:t> </a:t>
+                      </a:r>
+                      <a:r>
+                        <a:rPr lang="ko-KR" altLang="ko-KR" sz="1600" b="0" i="0" dirty="0" err="1">
+                          <a:solidFill>
+                            <a:schemeClr val="tx1"/>
+                          </a:solidFill>
+                          <a:effectLst/>
+                          <a:latin typeface="+mn-lt"/>
+                        </a:rPr>
+                        <a:t>콘솔·인증</a:t>
+                      </a:r>
+                      <a:r>
+                        <a:rPr lang="ko-KR" altLang="ko-KR" sz="1600" b="0" i="0" dirty="0">
+                          <a:solidFill>
+                            <a:schemeClr val="tx1"/>
+                          </a:solidFill>
+                          <a:effectLst/>
+                          <a:latin typeface="+mn-lt"/>
+                        </a:rPr>
+                        <a:t> 관련 페이지 등)을 자동 접근에서 차단</a:t>
+                      </a:r>
+                      <a:r>
+                        <a:rPr lang="en-US" altLang="ko-KR" sz="1600" b="0" i="0" dirty="0">
+                          <a:solidFill>
+                            <a:schemeClr val="tx1"/>
+                          </a:solidFill>
+                          <a:effectLst/>
+                          <a:latin typeface="+mn-lt"/>
+                        </a:rPr>
+                        <a:t>. </a:t>
+                      </a:r>
+                      <a:r>
+                        <a:rPr lang="ko-KR" altLang="en-US" sz="1600" b="0" i="0" dirty="0">
+                          <a:solidFill>
+                            <a:schemeClr val="tx1"/>
+                          </a:solidFill>
+                          <a:effectLst/>
+                          <a:latin typeface="+mn-lt"/>
+                        </a:rPr>
+                        <a:t>차단되는 경우 </a:t>
+                      </a:r>
+                      <a:r>
+                        <a:rPr lang="en-US" altLang="ko-KR" sz="1600" b="0" i="0" dirty="0" err="1">
+                          <a:solidFill>
+                            <a:schemeClr val="tx1"/>
+                          </a:solidFill>
+                          <a:effectLst/>
+                          <a:latin typeface="+mn-lt"/>
+                        </a:rPr>
+                        <a:t>PlayWright</a:t>
+                      </a:r>
+                      <a:r>
+                        <a:rPr lang="en-US" altLang="ko-KR" sz="1600" b="0" i="0" dirty="0">
+                          <a:solidFill>
+                            <a:schemeClr val="tx1"/>
+                          </a:solidFill>
+                          <a:effectLst/>
+                          <a:latin typeface="+mn-lt"/>
+                        </a:rPr>
+                        <a:t> MCP </a:t>
+                      </a:r>
+                      <a:r>
+                        <a:rPr lang="ko-KR" altLang="en-US" sz="1600" b="0" i="0" dirty="0">
+                          <a:solidFill>
+                            <a:schemeClr val="tx1"/>
+                          </a:solidFill>
+                          <a:effectLst/>
+                          <a:latin typeface="+mn-lt"/>
+                        </a:rPr>
+                        <a:t>사용</a:t>
+                      </a:r>
+                      <a:endParaRPr lang="en-US" sz="1600" dirty="0">
+                        <a:solidFill>
+                          <a:schemeClr val="tx1"/>
+                        </a:solidFill>
+                        <a:latin typeface="+mn-lt"/>
+                        <a:ea typeface="Pretendard" charset="0"/>
+                        <a:cs typeface="Pretendard" charset="0"/>
+                      </a:endParaRPr>
+                    </a:p>
+                  </a:txBody>
+                  <a:tcPr anchor="ctr">
+                    <a:lnL w="12700" cap="flat" cmpd="sng" algn="ctr">
+                      <a:solidFill>
+                        <a:srgbClr val="DDDDE0"/>
+                      </a:solidFill>
+                      <a:prstDash val="solid"/>
+                      <a:round/>
+                      <a:headEnd type="none" w="med" len="med"/>
+                      <a:tailEnd type="none" w="med" len="med"/>
+                    </a:lnL>
+                    <a:lnR w="12700" cap="flat" cmpd="sng" algn="ctr">
+                      <a:solidFill>
+                        <a:srgbClr val="DDDDE0"/>
+                      </a:solidFill>
+                      <a:prstDash val="solid"/>
+                      <a:round/>
+                      <a:headEnd type="none" w="med" len="med"/>
+                      <a:tailEnd type="none" w="med" len="med"/>
+                    </a:lnR>
+                    <a:lnT w="12700" cap="flat" cmpd="sng" algn="ctr">
+                      <a:solidFill>
+                        <a:srgbClr val="DDDDE0"/>
+                      </a:solidFill>
+                      <a:prstDash val="solid"/>
+                      <a:round/>
+                      <a:headEnd type="none" w="med" len="med"/>
+                      <a:tailEnd type="none" w="med" len="med"/>
+                    </a:lnT>
+                    <a:lnB w="12700" cap="flat" cmpd="sng" algn="ctr">
+                      <a:solidFill>
+                        <a:srgbClr val="DDDDE0"/>
+                      </a:solidFill>
+                      <a:prstDash val="solid"/>
+                      <a:round/>
+                      <a:headEnd type="none" w="med" len="med"/>
+                      <a:tailEnd type="none" w="med" len="med"/>
+                    </a:lnB>
+                  </a:tcPr>
+                </a:tc>
+                <a:extLst>
+                  <a:ext uri="{0D108BD9-81ED-4DB2-BD59-A6C34878D82A}">
+                    <a16:rowId xmlns:a16="http://schemas.microsoft.com/office/drawing/2014/main" val="1187110385"/>
                   </a:ext>
                 </a:extLst>
               </a:tr>
@@ -18315,7 +18738,7 @@
         </p:nvSpPr>
         <p:spPr>
           <a:xfrm>
-            <a:off x="502920" y="4572000"/>
+            <a:off x="502920" y="4893474"/>
             <a:ext cx="13716000" cy="914400"/>
           </a:xfrm>
           <a:prstGeom prst="rect">
@@ -18391,8 +18814,8 @@
         </p:nvGrpSpPr>
         <p:grpSpPr>
           <a:xfrm>
-            <a:off x="457200" y="5669279"/>
-            <a:ext cx="13716000" cy="1745934"/>
+            <a:off x="457200" y="5893593"/>
+            <a:ext cx="13716000" cy="1521619"/>
             <a:chOff x="457200" y="5669280"/>
             <a:chExt cx="13716000" cy="640080"/>
           </a:xfrm>
@@ -18422,7 +18845,7 @@
             <a:bodyPr/>
             <a:lstStyle/>
             <a:p>
-              <a:endParaRPr lang="ko-KR" altLang="en-US"/>
+              <a:endParaRPr lang="ko-KR" altLang="en-US" sz="1600"/>
             </a:p>
           </p:txBody>
         </p:sp>
@@ -18454,15 +18877,15 @@
                 <a:buNone/>
               </a:pPr>
               <a:r>
-                <a:rPr lang="en-US" sz="1600" dirty="0"/>
+                <a:rPr lang="en-US" sz="1400" dirty="0"/>
                 <a:t>CAPTHA(</a:t>
               </a:r>
               <a:r>
-                <a:rPr lang="ko-KR" altLang="en-US" sz="1600" dirty="0" err="1"/>
+                <a:rPr lang="ko-KR" altLang="en-US" sz="1400" dirty="0" err="1"/>
                 <a:t>캡차</a:t>
               </a:r>
               <a:r>
-                <a:rPr lang="en-US" altLang="ko-KR" sz="1600" dirty="0"/>
+                <a:rPr lang="en-US" altLang="ko-KR" sz="1400" dirty="0"/>
                 <a:t>: Completely Automated Public Turing test to tell Computers and Humans Apart)</a:t>
               </a:r>
             </a:p>
@@ -18474,10 +18897,10 @@
                 <a:buNone/>
               </a:pPr>
               <a:r>
-                <a:rPr lang="ko-KR" altLang="en-US" sz="1600" dirty="0"/>
+                <a:rPr lang="ko-KR" altLang="en-US" sz="1400" dirty="0"/>
                 <a:t>컴퓨터와 인간을 구분하기 위한 자동화된 테스트</a:t>
               </a:r>
-              <a:endParaRPr lang="en-US" altLang="ko-KR" sz="1600" dirty="0"/>
+              <a:endParaRPr lang="en-US" altLang="ko-KR" sz="1400" dirty="0"/>
             </a:p>
             <a:p>
               <a:pPr marL="0" indent="0" algn="l">
@@ -18487,18 +18910,18 @@
                 <a:buNone/>
               </a:pPr>
               <a:r>
-                <a:rPr lang="ko-KR" altLang="en-US" sz="1400" dirty="0"/>
+                <a:rPr lang="ko-KR" altLang="en-US" sz="1200" dirty="0"/>
                 <a:t>예시</a:t>
               </a:r>
               <a:r>
-                <a:rPr lang="en-US" altLang="ko-KR" sz="1400" dirty="0"/>
+                <a:rPr lang="en-US" altLang="ko-KR" sz="1200" dirty="0"/>
                 <a:t>)</a:t>
               </a:r>
               <a:r>
-                <a:rPr lang="ko-KR" altLang="en-US" sz="1600" dirty="0"/>
+                <a:rPr lang="ko-KR" altLang="en-US" sz="1400" dirty="0"/>
                 <a:t> </a:t>
               </a:r>
-              <a:endParaRPr lang="en-US" altLang="ko-KR" sz="1600" dirty="0"/>
+              <a:endParaRPr lang="en-US" altLang="ko-KR" sz="1400" dirty="0"/>
             </a:p>
             <a:p>
               <a:pPr marL="285750" indent="-285750" algn="l">
@@ -18509,22 +18932,22 @@
                 <a:buChar char="-"/>
               </a:pPr>
               <a:r>
-                <a:rPr lang="en-US" sz="1600" dirty="0"/>
+                <a:rPr lang="en-US" sz="1400" dirty="0"/>
                 <a:t>“</a:t>
               </a:r>
               <a:r>
-                <a:rPr lang="ko-KR" altLang="en-US" sz="1600" dirty="0"/>
+                <a:rPr lang="ko-KR" altLang="en-US" sz="1400" dirty="0"/>
                 <a:t>나는 로봇이 아닙니다</a:t>
               </a:r>
               <a:r>
-                <a:rPr lang="en-US" altLang="ko-KR" sz="1600" dirty="0"/>
+                <a:rPr lang="en-US" altLang="ko-KR" sz="1400" dirty="0"/>
                 <a:t>” </a:t>
               </a:r>
               <a:r>
-                <a:rPr lang="ko-KR" altLang="en-US" sz="1600" dirty="0"/>
+                <a:rPr lang="ko-KR" altLang="en-US" sz="1400" dirty="0"/>
                 <a:t>체크박스</a:t>
               </a:r>
-              <a:endParaRPr lang="en-US" altLang="ko-KR" sz="1600" dirty="0"/>
+              <a:endParaRPr lang="en-US" altLang="ko-KR" sz="1400" dirty="0"/>
             </a:p>
             <a:p>
               <a:pPr marL="285750" indent="-285750" algn="l">
@@ -18535,18 +18958,18 @@
                 <a:buChar char="-"/>
               </a:pPr>
               <a:r>
-                <a:rPr lang="ko-KR" altLang="en-US" sz="1600" dirty="0"/>
+                <a:rPr lang="ko-KR" altLang="en-US" sz="1400" dirty="0"/>
                 <a:t>화면에 찌그러져 보이는 글자</a:t>
               </a:r>
               <a:r>
-                <a:rPr lang="en-US" altLang="ko-KR" sz="1600" dirty="0"/>
+                <a:rPr lang="en-US" altLang="ko-KR" sz="1400" dirty="0"/>
                 <a:t>/</a:t>
               </a:r>
               <a:r>
-                <a:rPr lang="ko-KR" altLang="en-US" sz="1600" dirty="0"/>
+                <a:rPr lang="ko-KR" altLang="en-US" sz="1400" dirty="0"/>
                 <a:t>숫자 입력하기</a:t>
               </a:r>
-              <a:endParaRPr lang="en-US" altLang="ko-KR" sz="1600" dirty="0"/>
+              <a:endParaRPr lang="en-US" altLang="ko-KR" sz="1400" dirty="0"/>
             </a:p>
             <a:p>
               <a:pPr marL="285750" indent="-285750" algn="l">
@@ -18557,26 +18980,26 @@
                 <a:buChar char="-"/>
               </a:pPr>
               <a:r>
-                <a:rPr lang="ko-KR" altLang="en-US" sz="1600" dirty="0"/>
+                <a:rPr lang="ko-KR" altLang="en-US" sz="1400" dirty="0"/>
                 <a:t>신호등</a:t>
               </a:r>
               <a:r>
-                <a:rPr lang="en-US" altLang="ko-KR" sz="1600" dirty="0"/>
+                <a:rPr lang="en-US" altLang="ko-KR" sz="1400" dirty="0"/>
                 <a:t>, </a:t>
               </a:r>
               <a:r>
-                <a:rPr lang="ko-KR" altLang="en-US" sz="1600" dirty="0"/>
+                <a:rPr lang="ko-KR" altLang="en-US" sz="1400" dirty="0"/>
                 <a:t>횡단보도</a:t>
               </a:r>
               <a:r>
-                <a:rPr lang="en-US" altLang="ko-KR" sz="1600" dirty="0"/>
+                <a:rPr lang="en-US" altLang="ko-KR" sz="1400" dirty="0"/>
                 <a:t>, </a:t>
               </a:r>
               <a:r>
-                <a:rPr lang="ko-KR" altLang="en-US" sz="1600" dirty="0"/>
+                <a:rPr lang="ko-KR" altLang="en-US" sz="1400" dirty="0"/>
                 <a:t>버스 등 특정 조건의 이미지 선택하기</a:t>
               </a:r>
-              <a:endParaRPr lang="en-US" sz="1600" dirty="0"/>
+              <a:endParaRPr lang="en-US" sz="1400" dirty="0"/>
             </a:p>
           </p:txBody>
         </p:sp>
@@ -18601,7 +19024,7 @@
           </a:prstGeom>
           <a:extLst>
             <a:ext uri="{C572A759-6A51-4108-AA02-DFA0A04FC94B}">
-              <ma14:wrappingTextBoxFlag xmlns:ma14="http://schemas.microsoft.com/office/mac/drawingml/2011/main" xmlns="" val="0"/>
+              <ma14:wrappingTextBoxFlag xmlns="" xmlns:ma14="http://schemas.microsoft.com/office/mac/drawingml/2011/main" val="0"/>
             </a:ext>
           </a:extLst>
         </p:spPr>
@@ -19660,7 +20083,7 @@
           </a:prstGeom>
           <a:extLst>
             <a:ext uri="{C572A759-6A51-4108-AA02-DFA0A04FC94B}">
-              <ma14:wrappingTextBoxFlag xmlns:ma14="http://schemas.microsoft.com/office/mac/drawingml/2011/main" xmlns="" val="0"/>
+              <ma14:wrappingTextBoxFlag xmlns="" xmlns:ma14="http://schemas.microsoft.com/office/mac/drawingml/2011/main" val="0"/>
             </a:ext>
           </a:extLst>
         </p:spPr>
@@ -20550,7 +20973,7 @@
           </a:prstGeom>
           <a:extLst>
             <a:ext uri="{C572A759-6A51-4108-AA02-DFA0A04FC94B}">
-              <ma14:wrappingTextBoxFlag xmlns:ma14="http://schemas.microsoft.com/office/mac/drawingml/2011/main" xmlns="" val="0"/>
+              <ma14:wrappingTextBoxFlag xmlns="" xmlns:ma14="http://schemas.microsoft.com/office/mac/drawingml/2011/main" val="0"/>
             </a:ext>
           </a:extLst>
         </p:spPr>
@@ -21669,7 +22092,7 @@
           </a:prstGeom>
           <a:extLst>
             <a:ext uri="{C572A759-6A51-4108-AA02-DFA0A04FC94B}">
-              <ma14:wrappingTextBoxFlag xmlns:ma14="http://schemas.microsoft.com/office/mac/drawingml/2011/main" xmlns="" val="0"/>
+              <ma14:wrappingTextBoxFlag xmlns="" xmlns:ma14="http://schemas.microsoft.com/office/mac/drawingml/2011/main" val="0"/>
             </a:ext>
           </a:extLst>
         </p:spPr>

--- a/decks/04-skill-advanced-mcp/4회차-Skill심화-웹MCP-MCP개발.pptx
+++ b/decks/04-skill-advanced-mcp/4회차-Skill심화-웹MCP-MCP개발.pptx
@@ -1908,7 +1908,7 @@
                 <a:ea typeface="Pretendard" pitchFamily="34" charset="-122"/>
                 <a:cs typeface="Pretendard" pitchFamily="34" charset="-120"/>
               </a:rPr>
-              <a:t>ⓒ ICTK · Unicorn — Claude Code 업무 자동화 부트캠프 4회차 · 무단전재 및 배포 금지</a:t>
+              <a:t>ⓒ Unicorn — Claude Code 업무 자동화 부트캠프 4회차 · 무단전재 및 배포 금지</a:t>
             </a:r>
             <a:endParaRPr lang="en-US" sz="1600" dirty="0"/>
           </a:p>
@@ -1934,7 +1934,7 @@
           </a:prstGeom>
           <a:extLst>
             <a:ext uri="{C572A759-6A51-4108-AA02-DFA0A04FC94B}">
-              <ma14:wrappingTextBoxFlag xmlns="" xmlns:ma14="http://schemas.microsoft.com/office/mac/drawingml/2011/main" val="0"/>
+              <ma14:wrappingTextBoxFlag xmlns:ma14="http://schemas.microsoft.com/office/mac/drawingml/2011/main" xmlns="" val="0"/>
             </a:ext>
           </a:extLst>
         </p:spPr>
@@ -2221,7 +2221,7 @@
           </a:prstGeom>
           <a:extLst>
             <a:ext uri="{C572A759-6A51-4108-AA02-DFA0A04FC94B}">
-              <ma14:wrappingTextBoxFlag xmlns="" xmlns:ma14="http://schemas.microsoft.com/office/mac/drawingml/2011/main" val="0"/>
+              <ma14:wrappingTextBoxFlag xmlns:ma14="http://schemas.microsoft.com/office/mac/drawingml/2011/main" xmlns="" val="0"/>
             </a:ext>
           </a:extLst>
         </p:spPr>
@@ -2829,7 +2829,7 @@
               <a:buNone/>
             </a:pPr>
             <a:r>
-              <a:rPr lang="en-US" sz="1600" dirty="0">
+              <a:rPr lang="en-US" sz="1600" dirty="0" err="1">
                 <a:solidFill>
                   <a:srgbClr val="505060"/>
                 </a:solidFill>
@@ -2837,7 +2837,18 @@
                 <a:ea typeface="Pretendard" pitchFamily="34" charset="-122"/>
                 <a:cs typeface="Pretendard" pitchFamily="34" charset="-120"/>
               </a:rPr>
-              <a:t>ICTK 임직원 (비개발자 포함 입문자)</a:t>
+              <a:t>임직원</a:t>
+            </a:r>
+            <a:r>
+              <a:rPr lang="en-US" sz="1600" dirty="0">
+                <a:solidFill>
+                  <a:srgbClr val="505060"/>
+                </a:solidFill>
+                <a:latin typeface="Pretendard" pitchFamily="34" charset="0"/>
+                <a:ea typeface="Pretendard" pitchFamily="34" charset="-122"/>
+                <a:cs typeface="Pretendard" pitchFamily="34" charset="-120"/>
+              </a:rPr>
+              <a:t> (비개발자 포함 입문자)</a:t>
             </a:r>
             <a:endParaRPr lang="en-US" sz="1600" dirty="0"/>
           </a:p>
@@ -3288,7 +3299,7 @@
           </a:prstGeom>
           <a:extLst>
             <a:ext uri="{C572A759-6A51-4108-AA02-DFA0A04FC94B}">
-              <ma14:wrappingTextBoxFlag xmlns="" xmlns:ma14="http://schemas.microsoft.com/office/mac/drawingml/2011/main" val="0"/>
+              <ma14:wrappingTextBoxFlag xmlns:ma14="http://schemas.microsoft.com/office/mac/drawingml/2011/main" xmlns="" val="0"/>
             </a:ext>
           </a:extLst>
         </p:spPr>
@@ -11424,7 +11435,7 @@
           </a:prstGeom>
           <a:extLst>
             <a:ext uri="{C572A759-6A51-4108-AA02-DFA0A04FC94B}">
-              <ma14:wrappingTextBoxFlag xmlns="" xmlns:ma14="http://schemas.microsoft.com/office/mac/drawingml/2011/main" val="0"/>
+              <ma14:wrappingTextBoxFlag xmlns:ma14="http://schemas.microsoft.com/office/mac/drawingml/2011/main" xmlns="" val="0"/>
             </a:ext>
           </a:extLst>
         </p:spPr>
@@ -13111,7 +13122,7 @@
           </a:prstGeom>
           <a:extLst>
             <a:ext uri="{C572A759-6A51-4108-AA02-DFA0A04FC94B}">
-              <ma14:wrappingTextBoxFlag xmlns="" xmlns:ma14="http://schemas.microsoft.com/office/mac/drawingml/2011/main" val="0"/>
+              <ma14:wrappingTextBoxFlag xmlns:ma14="http://schemas.microsoft.com/office/mac/drawingml/2011/main" xmlns="" val="0"/>
             </a:ext>
           </a:extLst>
         </p:spPr>
@@ -14870,7 +14881,7 @@
           </a:prstGeom>
           <a:extLst>
             <a:ext uri="{C572A759-6A51-4108-AA02-DFA0A04FC94B}">
-              <ma14:wrappingTextBoxFlag xmlns="" xmlns:ma14="http://schemas.microsoft.com/office/mac/drawingml/2011/main" val="0"/>
+              <ma14:wrappingTextBoxFlag xmlns:ma14="http://schemas.microsoft.com/office/mac/drawingml/2011/main" xmlns="" val="0"/>
             </a:ext>
           </a:extLst>
         </p:spPr>
@@ -16978,7 +16989,7 @@
           </a:prstGeom>
           <a:extLst>
             <a:ext uri="{C572A759-6A51-4108-AA02-DFA0A04FC94B}">
-              <ma14:wrappingTextBoxFlag xmlns="" xmlns:ma14="http://schemas.microsoft.com/office/mac/drawingml/2011/main" val="0"/>
+              <ma14:wrappingTextBoxFlag xmlns:ma14="http://schemas.microsoft.com/office/mac/drawingml/2011/main" xmlns="" val="0"/>
             </a:ext>
           </a:extLst>
         </p:spPr>
@@ -19024,7 +19035,7 @@
           </a:prstGeom>
           <a:extLst>
             <a:ext uri="{C572A759-6A51-4108-AA02-DFA0A04FC94B}">
-              <ma14:wrappingTextBoxFlag xmlns="" xmlns:ma14="http://schemas.microsoft.com/office/mac/drawingml/2011/main" val="0"/>
+              <ma14:wrappingTextBoxFlag xmlns:ma14="http://schemas.microsoft.com/office/mac/drawingml/2011/main" xmlns="" val="0"/>
             </a:ext>
           </a:extLst>
         </p:spPr>
@@ -20083,7 +20094,7 @@
           </a:prstGeom>
           <a:extLst>
             <a:ext uri="{C572A759-6A51-4108-AA02-DFA0A04FC94B}">
-              <ma14:wrappingTextBoxFlag xmlns="" xmlns:ma14="http://schemas.microsoft.com/office/mac/drawingml/2011/main" val="0"/>
+              <ma14:wrappingTextBoxFlag xmlns:ma14="http://schemas.microsoft.com/office/mac/drawingml/2011/main" xmlns="" val="0"/>
             </a:ext>
           </a:extLst>
         </p:spPr>
@@ -20973,7 +20984,7 @@
           </a:prstGeom>
           <a:extLst>
             <a:ext uri="{C572A759-6A51-4108-AA02-DFA0A04FC94B}">
-              <ma14:wrappingTextBoxFlag xmlns="" xmlns:ma14="http://schemas.microsoft.com/office/mac/drawingml/2011/main" val="0"/>
+              <ma14:wrappingTextBoxFlag xmlns:ma14="http://schemas.microsoft.com/office/mac/drawingml/2011/main" xmlns="" val="0"/>
             </a:ext>
           </a:extLst>
         </p:spPr>
@@ -22092,7 +22103,7 @@
           </a:prstGeom>
           <a:extLst>
             <a:ext uri="{C572A759-6A51-4108-AA02-DFA0A04FC94B}">
-              <ma14:wrappingTextBoxFlag xmlns="" xmlns:ma14="http://schemas.microsoft.com/office/mac/drawingml/2011/main" val="0"/>
+              <ma14:wrappingTextBoxFlag xmlns:ma14="http://schemas.microsoft.com/office/mac/drawingml/2011/main" xmlns="" val="0"/>
             </a:ext>
           </a:extLst>
         </p:spPr>
